--- a/assets/libreoffice_impr_njc/9fadf13a-c7f5-483c-a6e4-84dbe342ec6f/Bitcoin_ The Digital Revolution.pptx
+++ b/assets/libreoffice_impr_njc/9fadf13a-c7f5-483c-a6e4-84dbe342ec6f/Bitcoin_ The Digital Revolution.pptx
@@ -1,6 +1,6 @@
 
 <file path=ppt/presentation.xml><?xml version="1.0" encoding="utf-8"?>
-<p:presentation xmlns:a="http://schemas.openxmlformats.org/drawingml/2006/main" xmlns:r="http://schemas.openxmlformats.org/officeDocument/2006/relationships" xmlns:p="http://schemas.openxmlformats.org/presentationml/2006/main" saveSubsetFonts="1" autoCompressPictures="0">
+<p:presentation xmlns:p="http://schemas.openxmlformats.org/presentationml/2006/main" xmlns:r="http://schemas.openxmlformats.org/officeDocument/2006/relationships" saveSubsetFonts="1" autoCompressPictures="0">
   <p:sldMasterIdLst>
     <p:sldMasterId id="2147483648" r:id="rId1"/>
   </p:sldMasterIdLst>
@@ -29,9 +29,6 @@
     <p:sldId id="277" r:id="rId23"/>
     <p:sldId id="278" r:id="rId24"/>
     <p:sldId id="279" r:id="rId25"/>
-    <p:sldId id="280" r:id="rId26"/>
-    <p:sldId id="281" r:id="rId27"/>
-    <p:sldId id="282" r:id="rId28"/>
   </p:sldIdLst>
   <p:notesMasterIdLst>
     <p:notesMasterId r:id="rId29"/>
@@ -1886,270 +1883,6 @@
 </p:notes>
 </file>
 
-<file path=ppt/notesSlides/notesSlide25.xml><?xml version="1.0" encoding="utf-8"?>
-<p:notes xmlns:a="http://schemas.openxmlformats.org/drawingml/2006/main" xmlns:r="http://schemas.openxmlformats.org/officeDocument/2006/relationships" xmlns:p="http://schemas.openxmlformats.org/presentationml/2006/main">
-  <p:cSld>
-    <p:spTree>
-      <p:nvGrpSpPr>
-        <p:cNvPr id="1" name=""/>
-        <p:cNvGrpSpPr/>
-        <p:nvPr/>
-      </p:nvGrpSpPr>
-      <p:grpSpPr>
-        <a:xfrm>
-          <a:off x="0" y="0"/>
-          <a:ext cx="0" cy="0"/>
-          <a:chOff x="0" y="0"/>
-          <a:chExt cx="0" cy="0"/>
-        </a:xfrm>
-      </p:grpSpPr>
-      <p:sp>
-        <p:nvSpPr>
-          <p:cNvPr id="2" name="Slide Image Placeholder 1"/>
-          <p:cNvSpPr>
-            <a:spLocks noGrp="1" noRot="1" noChangeAspect="1"/>
-          </p:cNvSpPr>
-          <p:nvPr>
-            <p:ph type="sldImg"/>
-          </p:nvPr>
-        </p:nvSpPr>
-        <p:spPr/>
-      </p:sp>
-      <p:sp>
-        <p:nvSpPr>
-          <p:cNvPr id="3" name="Notes Placeholder 2"/>
-          <p:cNvSpPr>
-            <a:spLocks noGrp="1"/>
-          </p:cNvSpPr>
-          <p:nvPr>
-            <p:ph type="body" idx="1"/>
-          </p:nvPr>
-        </p:nvSpPr>
-        <p:spPr/>
-        <p:txBody>
-          <a:bodyPr/>
-          <a:lstStyle/>
-          <a:p>
-            <a:r>
-              <a:rPr lang="en-US" dirty="0"/>
-              <a:t/>
-            </a:r>
-            <a:endParaRPr lang="en-US" dirty="0"/>
-          </a:p>
-        </p:txBody>
-      </p:sp>
-      <p:sp>
-        <p:nvSpPr>
-          <p:cNvPr id="4" name="Slide Number Placeholder 3"/>
-          <p:cNvSpPr>
-            <a:spLocks noGrp="1"/>
-          </p:cNvSpPr>
-          <p:nvPr>
-            <p:ph type="sldNum" sz="quarter" idx="10"/>
-          </p:nvPr>
-        </p:nvSpPr>
-        <p:spPr/>
-        <p:txBody>
-          <a:bodyPr/>
-          <a:lstStyle/>
-          <a:p>
-            <a:fld id="{F7021451-1387-4CA6-816F-3879F97B5CBC}" type="slidenum">
-              <a:rPr lang="en-US"/>
-              <a:t>25</a:t>
-            </a:fld>
-            <a:endParaRPr lang="en-US"/>
-          </a:p>
-        </p:txBody>
-      </p:sp>
-    </p:spTree>
-    <p:extLst>
-      <p:ext uri="{BB962C8B-B14F-4D97-AF65-F5344CB8AC3E}">
-        <p14:creationId xmlns:p14="http://schemas.microsoft.com/office/powerpoint/2010/main" val="1024086991"/>
-      </p:ext>
-    </p:extLst>
-  </p:cSld>
-  <p:clrMapOvr>
-    <a:masterClrMapping/>
-  </p:clrMapOvr>
-</p:notes>
-</file>
-
-<file path=ppt/notesSlides/notesSlide26.xml><?xml version="1.0" encoding="utf-8"?>
-<p:notes xmlns:a="http://schemas.openxmlformats.org/drawingml/2006/main" xmlns:r="http://schemas.openxmlformats.org/officeDocument/2006/relationships" xmlns:p="http://schemas.openxmlformats.org/presentationml/2006/main">
-  <p:cSld>
-    <p:spTree>
-      <p:nvGrpSpPr>
-        <p:cNvPr id="1" name=""/>
-        <p:cNvGrpSpPr/>
-        <p:nvPr/>
-      </p:nvGrpSpPr>
-      <p:grpSpPr>
-        <a:xfrm>
-          <a:off x="0" y="0"/>
-          <a:ext cx="0" cy="0"/>
-          <a:chOff x="0" y="0"/>
-          <a:chExt cx="0" cy="0"/>
-        </a:xfrm>
-      </p:grpSpPr>
-      <p:sp>
-        <p:nvSpPr>
-          <p:cNvPr id="2" name="Slide Image Placeholder 1"/>
-          <p:cNvSpPr>
-            <a:spLocks noGrp="1" noRot="1" noChangeAspect="1"/>
-          </p:cNvSpPr>
-          <p:nvPr>
-            <p:ph type="sldImg"/>
-          </p:nvPr>
-        </p:nvSpPr>
-        <p:spPr/>
-      </p:sp>
-      <p:sp>
-        <p:nvSpPr>
-          <p:cNvPr id="3" name="Notes Placeholder 2"/>
-          <p:cNvSpPr>
-            <a:spLocks noGrp="1"/>
-          </p:cNvSpPr>
-          <p:nvPr>
-            <p:ph type="body" idx="1"/>
-          </p:nvPr>
-        </p:nvSpPr>
-        <p:spPr/>
-        <p:txBody>
-          <a:bodyPr/>
-          <a:lstStyle/>
-          <a:p>
-            <a:r>
-              <a:rPr lang="en-US" dirty="0"/>
-              <a:t/>
-            </a:r>
-            <a:endParaRPr lang="en-US" dirty="0"/>
-          </a:p>
-        </p:txBody>
-      </p:sp>
-      <p:sp>
-        <p:nvSpPr>
-          <p:cNvPr id="4" name="Slide Number Placeholder 3"/>
-          <p:cNvSpPr>
-            <a:spLocks noGrp="1"/>
-          </p:cNvSpPr>
-          <p:nvPr>
-            <p:ph type="sldNum" sz="quarter" idx="10"/>
-          </p:nvPr>
-        </p:nvSpPr>
-        <p:spPr/>
-        <p:txBody>
-          <a:bodyPr/>
-          <a:lstStyle/>
-          <a:p>
-            <a:fld id="{F7021451-1387-4CA6-816F-3879F97B5CBC}" type="slidenum">
-              <a:rPr lang="en-US"/>
-              <a:t>26</a:t>
-            </a:fld>
-            <a:endParaRPr lang="en-US"/>
-          </a:p>
-        </p:txBody>
-      </p:sp>
-    </p:spTree>
-    <p:extLst>
-      <p:ext uri="{BB962C8B-B14F-4D97-AF65-F5344CB8AC3E}">
-        <p14:creationId xmlns:p14="http://schemas.microsoft.com/office/powerpoint/2010/main" val="1024086991"/>
-      </p:ext>
-    </p:extLst>
-  </p:cSld>
-  <p:clrMapOvr>
-    <a:masterClrMapping/>
-  </p:clrMapOvr>
-</p:notes>
-</file>
-
-<file path=ppt/notesSlides/notesSlide27.xml><?xml version="1.0" encoding="utf-8"?>
-<p:notes xmlns:a="http://schemas.openxmlformats.org/drawingml/2006/main" xmlns:r="http://schemas.openxmlformats.org/officeDocument/2006/relationships" xmlns:p="http://schemas.openxmlformats.org/presentationml/2006/main">
-  <p:cSld>
-    <p:spTree>
-      <p:nvGrpSpPr>
-        <p:cNvPr id="1" name=""/>
-        <p:cNvGrpSpPr/>
-        <p:nvPr/>
-      </p:nvGrpSpPr>
-      <p:grpSpPr>
-        <a:xfrm>
-          <a:off x="0" y="0"/>
-          <a:ext cx="0" cy="0"/>
-          <a:chOff x="0" y="0"/>
-          <a:chExt cx="0" cy="0"/>
-        </a:xfrm>
-      </p:grpSpPr>
-      <p:sp>
-        <p:nvSpPr>
-          <p:cNvPr id="2" name="Slide Image Placeholder 1"/>
-          <p:cNvSpPr>
-            <a:spLocks noGrp="1" noRot="1" noChangeAspect="1"/>
-          </p:cNvSpPr>
-          <p:nvPr>
-            <p:ph type="sldImg"/>
-          </p:nvPr>
-        </p:nvSpPr>
-        <p:spPr/>
-      </p:sp>
-      <p:sp>
-        <p:nvSpPr>
-          <p:cNvPr id="3" name="Notes Placeholder 2"/>
-          <p:cNvSpPr>
-            <a:spLocks noGrp="1"/>
-          </p:cNvSpPr>
-          <p:nvPr>
-            <p:ph type="body" idx="1"/>
-          </p:nvPr>
-        </p:nvSpPr>
-        <p:spPr/>
-        <p:txBody>
-          <a:bodyPr/>
-          <a:lstStyle/>
-          <a:p>
-            <a:r>
-              <a:rPr lang="en-US" dirty="0"/>
-              <a:t/>
-            </a:r>
-            <a:endParaRPr lang="en-US" dirty="0"/>
-          </a:p>
-        </p:txBody>
-      </p:sp>
-      <p:sp>
-        <p:nvSpPr>
-          <p:cNvPr id="4" name="Slide Number Placeholder 3"/>
-          <p:cNvSpPr>
-            <a:spLocks noGrp="1"/>
-          </p:cNvSpPr>
-          <p:nvPr>
-            <p:ph type="sldNum" sz="quarter" idx="10"/>
-          </p:nvPr>
-        </p:nvSpPr>
-        <p:spPr/>
-        <p:txBody>
-          <a:bodyPr/>
-          <a:lstStyle/>
-          <a:p>
-            <a:fld id="{F7021451-1387-4CA6-816F-3879F97B5CBC}" type="slidenum">
-              <a:rPr lang="en-US"/>
-              <a:t>27</a:t>
-            </a:fld>
-            <a:endParaRPr lang="en-US"/>
-          </a:p>
-        </p:txBody>
-      </p:sp>
-    </p:spTree>
-    <p:extLst>
-      <p:ext uri="{BB962C8B-B14F-4D97-AF65-F5344CB8AC3E}">
-        <p14:creationId xmlns:p14="http://schemas.microsoft.com/office/powerpoint/2010/main" val="1024086991"/>
-      </p:ext>
-    </p:extLst>
-  </p:cSld>
-  <p:clrMapOvr>
-    <a:masterClrMapping/>
-  </p:clrMapOvr>
-</p:notes>
-</file>
-
 <file path=ppt/notesSlides/notesSlide3.xml><?xml version="1.0" encoding="utf-8"?>
 <p:notes xmlns:a="http://schemas.openxmlformats.org/drawingml/2006/main" xmlns:r="http://schemas.openxmlformats.org/officeDocument/2006/relationships" xmlns:p="http://schemas.openxmlformats.org/presentationml/2006/main">
   <p:cSld>
@@ -2415,7 +2148,7 @@
 </file>
 
 <file path=ppt/notesSlides/notesSlide6.xml><?xml version="1.0" encoding="utf-8"?>
-<p:notes xmlns:a="http://schemas.openxmlformats.org/drawingml/2006/main" xmlns:r="http://schemas.openxmlformats.org/officeDocument/2006/relationships" xmlns:p="http://schemas.openxmlformats.org/presentationml/2006/main">
+<p:notes xmlns:a="http://schemas.openxmlformats.org/drawingml/2006/main" xmlns:ns2="http://schemas.microsoft.com/office/powerpoint/2010/main" xmlns:p="http://schemas.openxmlformats.org/presentationml/2006/main">
   <p:cSld>
     <p:spTree>
       <p:nvGrpSpPr>
@@ -2459,10 +2192,10 @@
           <a:lstStyle/>
           <a:p>
             <a:r>
-              <a:rPr lang="en-US" dirty="0"/>
-              <a:t/>
-            </a:r>
-            <a:endParaRPr lang="en-US" dirty="0"/>
+              <a:rPr lang="en-US"/>
+              <a:t>Summary: Bitcoin has fundamentally changed how we think about money, trust, and decentralized systems.</a:t>
+            </a:r>
+            <a:endParaRPr lang="en-US"/>
           </a:p>
         </p:txBody>
       </p:sp>
@@ -2492,7 +2225,7 @@
     </p:spTree>
     <p:extLst>
       <p:ext uri="{BB962C8B-B14F-4D97-AF65-F5344CB8AC3E}">
-        <p14:creationId xmlns:p14="http://schemas.microsoft.com/office/powerpoint/2010/main" val="1024086991"/>
+        <ns2:creationId val="1024086991"/>
       </p:ext>
     </p:extLst>
   </p:cSld>
@@ -3107,12 +2840,12 @@
 </file>
 
 <file path=ppt/slides/slide1.xml><?xml version="1.0" encoding="utf-8"?>
-<p:sld xmlns:a="http://schemas.openxmlformats.org/drawingml/2006/main" xmlns:r="http://schemas.openxmlformats.org/officeDocument/2006/relationships" xmlns:p="http://schemas.openxmlformats.org/presentationml/2006/main">
+<p:sld xmlns:a="http://schemas.openxmlformats.org/drawingml/2006/main" xmlns:p="http://schemas.openxmlformats.org/presentationml/2006/main" xmlns:r="http://schemas.openxmlformats.org/officeDocument/2006/relationships">
   <p:cSld name="Slide 1">
     <p:bg>
       <p:bgPr>
         <a:solidFill>
-          <a:srgbClr val="FFFFFF"/>
+          <a:srgbClr val="003366"/>
         </a:solidFill>
       </p:bgPr>
     </p:bg>
@@ -3286,17 +3019,21 @@
               </a:lnSpc>
             </a:pPr>
             <a:r>
-              <a:rPr lang="en-US" sz="1500" b="1" spc="150" kern="0" dirty="0">
-                <a:solidFill>
-                  <a:srgbClr val="000000"/>
-                </a:solidFill>
+              <a:rPr lang="en-US" sz="3600" b="1" spc="150" kern="0" dirty="0">
                 <a:latin typeface="Noto Sans SC" pitchFamily="34" charset="0"/>
                 <a:ea typeface="Noto Sans SC" pitchFamily="34" charset="-122"/>
                 <a:cs typeface="Noto Sans SC" pitchFamily="34" charset="-120"/>
+                <a:solidFill>
+                  <a:srgbClr val="FFFFFF"/>
+                </a:solidFill>
               </a:rPr>
               <a:t>FINANCIAL LECTURE SERIES</a:t>
             </a:r>
-            <a:endParaRPr lang="en-US" sz="1600" dirty="0"/>
+            <a:endParaRPr lang="en-US" sz="3600" dirty="0" b="1">
+              <a:solidFill>
+                <a:srgbClr val="FFFFFF"/>
+              </a:solidFill>
+            </a:endParaRPr>
           </a:p>
         </p:txBody>
       </p:sp>
@@ -3383,17 +3120,21 @@
               </a:lnSpc>
             </a:pPr>
             <a:r>
-              <a:rPr lang="en-US" sz="7200" b="1" dirty="0">
-                <a:solidFill>
-                  <a:srgbClr val="000000"/>
-                </a:solidFill>
+              <a:rPr lang="en-US" sz="3600" b="1" dirty="0">
                 <a:latin typeface="Noto Sans SC" pitchFamily="34" charset="0"/>
                 <a:ea typeface="Noto Sans SC" pitchFamily="34" charset="-122"/>
                 <a:cs typeface="Noto Sans SC" pitchFamily="34" charset="-120"/>
+                <a:solidFill>
+                  <a:srgbClr val="FFFFFF"/>
+                </a:solidFill>
               </a:rPr>
               <a:t>BITCOIN</a:t>
             </a:r>
-            <a:endParaRPr lang="en-US" sz="1600" dirty="0"/>
+            <a:endParaRPr lang="en-US" sz="3600" dirty="0" b="1">
+              <a:solidFill>
+                <a:srgbClr val="FFFFFF"/>
+              </a:solidFill>
+            </a:endParaRPr>
           </a:p>
         </p:txBody>
       </p:sp>
@@ -3468,17 +3209,21 @@
               </a:lnSpc>
             </a:pPr>
             <a:r>
-              <a:rPr lang="en-US" sz="2700" b="1" dirty="0">
-                <a:solidFill>
-                  <a:srgbClr val="000000"/>
-                </a:solidFill>
+              <a:rPr lang="en-US" sz="3600" b="1" dirty="0">
                 <a:latin typeface="Noto Sans SC" pitchFamily="34" charset="0"/>
                 <a:ea typeface="Noto Sans SC" pitchFamily="34" charset="-122"/>
                 <a:cs typeface="Noto Sans SC" pitchFamily="34" charset="-120"/>
+                <a:solidFill>
+                  <a:srgbClr val="FFFFFF"/>
+                </a:solidFill>
               </a:rPr>
               <a:t>THE DIGITAL REVOLUTION</a:t>
             </a:r>
-            <a:endParaRPr lang="en-US" sz="1600" dirty="0"/>
+            <a:endParaRPr lang="en-US" sz="3600" dirty="0" b="1">
+              <a:solidFill>
+                <a:srgbClr val="FFFFFF"/>
+              </a:solidFill>
+            </a:endParaRPr>
           </a:p>
         </p:txBody>
       </p:sp>
@@ -3509,17 +3254,21 @@
               </a:lnSpc>
             </a:pPr>
             <a:r>
-              <a:rPr lang="en-US" sz="1800" dirty="0">
-                <a:solidFill>
-                  <a:srgbClr val="000000"/>
-                </a:solidFill>
+              <a:rPr lang="en-US" sz="3600" dirty="0" b="1">
                 <a:latin typeface="Noto Sans SC" pitchFamily="34" charset="0"/>
                 <a:ea typeface="Noto Sans SC" pitchFamily="34" charset="-122"/>
                 <a:cs typeface="Noto Sans SC" pitchFamily="34" charset="-120"/>
+                <a:solidFill>
+                  <a:srgbClr val="FFFFFF"/>
+                </a:solidFill>
               </a:rPr>
               <a:t>A Comprehensive Analysis of History, Present &amp; Future</a:t>
             </a:r>
-            <a:endParaRPr lang="en-US" sz="1600" dirty="0"/>
+            <a:endParaRPr lang="en-US" sz="3600" dirty="0" b="1">
+              <a:solidFill>
+                <a:srgbClr val="FFFFFF"/>
+              </a:solidFill>
+            </a:endParaRPr>
           </a:p>
         </p:txBody>
       </p:sp>
@@ -3606,17 +3355,21 @@
               </a:lnSpc>
             </a:pPr>
             <a:r>
-              <a:rPr lang="en-US" sz="1350" b="1" dirty="0">
-                <a:solidFill>
-                  <a:srgbClr val="000000"/>
-                </a:solidFill>
+              <a:rPr lang="en-US" sz="3600" b="1" dirty="0">
                 <a:latin typeface="MiSans" pitchFamily="34" charset="0"/>
                 <a:ea typeface="MiSans" pitchFamily="34" charset="-122"/>
                 <a:cs typeface="MiSans" pitchFamily="34" charset="-120"/>
+                <a:solidFill>
+                  <a:srgbClr val="FFFFFF"/>
+                </a:solidFill>
               </a:rPr>
               <a:t>March 2026</a:t>
             </a:r>
-            <a:endParaRPr lang="en-US" sz="1600" dirty="0"/>
+            <a:endParaRPr lang="en-US" sz="3600" dirty="0" b="1">
+              <a:solidFill>
+                <a:srgbClr val="FFFFFF"/>
+              </a:solidFill>
+            </a:endParaRPr>
           </a:p>
         </p:txBody>
       </p:sp>
@@ -3703,17 +3456,21 @@
               </a:lnSpc>
             </a:pPr>
             <a:r>
-              <a:rPr lang="en-US" sz="1350" b="1" dirty="0">
-                <a:solidFill>
-                  <a:srgbClr val="000000"/>
-                </a:solidFill>
+              <a:rPr lang="en-US" sz="3600" b="1" dirty="0">
                 <a:latin typeface="MiSans" pitchFamily="34" charset="0"/>
                 <a:ea typeface="MiSans" pitchFamily="34" charset="-122"/>
                 <a:cs typeface="MiSans" pitchFamily="34" charset="-120"/>
+                <a:solidFill>
+                  <a:srgbClr val="FFFFFF"/>
+                </a:solidFill>
               </a:rPr>
               <a:t>▶ 27 SLIDES</a:t>
             </a:r>
-            <a:endParaRPr lang="en-US" sz="1600" dirty="0"/>
+            <a:endParaRPr lang="en-US" sz="3600" dirty="0" b="1">
+              <a:solidFill>
+                <a:srgbClr val="FFFFFF"/>
+              </a:solidFill>
+            </a:endParaRPr>
           </a:p>
         </p:txBody>
       </p:sp>
@@ -22400,7 +22157,7 @@
 </file>
 
 <file path=ppt/slides/slide2.xml><?xml version="1.0" encoding="utf-8"?>
-<p:sld xmlns:a="http://schemas.openxmlformats.org/drawingml/2006/main" xmlns:r="http://schemas.openxmlformats.org/officeDocument/2006/relationships" xmlns:p="http://schemas.openxmlformats.org/presentationml/2006/main">
+<p:sld xmlns:a="http://schemas.openxmlformats.org/drawingml/2006/main" xmlns:p="http://schemas.openxmlformats.org/presentationml/2006/main">
   <p:cSld name="Slide 2">
     <p:bg>
       <p:bgPr>
@@ -22500,16 +22257,20 @@
             </a:pPr>
             <a:r>
               <a:rPr lang="en-US" sz="3750" b="1" dirty="0">
-                <a:solidFill>
-                  <a:srgbClr val="000000"/>
-                </a:solidFill>
                 <a:latin typeface="Noto Sans SC" pitchFamily="34" charset="0"/>
                 <a:ea typeface="Noto Sans SC" pitchFamily="34" charset="-122"/>
                 <a:cs typeface="Noto Sans SC" pitchFamily="34" charset="-120"/>
+                <a:solidFill>
+                  <a:srgbClr val="FF7F00"/>
+                </a:solidFill>
               </a:rPr>
               <a:t>CONTENTS</a:t>
             </a:r>
-            <a:endParaRPr lang="en-US" sz="1600" dirty="0"/>
+            <a:endParaRPr lang="en-US" sz="1600" dirty="0" b="1">
+              <a:solidFill>
+                <a:srgbClr val="FF7F00"/>
+              </a:solidFill>
+            </a:endParaRPr>
           </a:p>
         </p:txBody>
       </p:sp>
@@ -35655,3080 +35416,8 @@
 </p:sld>
 </file>
 
-<file path=ppt/slides/slide25.xml><?xml version="1.0" encoding="utf-8"?>
-<p:sld xmlns:a="http://schemas.openxmlformats.org/drawingml/2006/main" xmlns:r="http://schemas.openxmlformats.org/officeDocument/2006/relationships" xmlns:p="http://schemas.openxmlformats.org/presentationml/2006/main">
-  <p:cSld name="Slide 25">
-    <p:bg>
-      <p:bgPr>
-        <a:solidFill>
-          <a:srgbClr val="FFFFFF"/>
-        </a:solidFill>
-      </p:bgPr>
-    </p:bg>
-    <p:spTree>
-      <p:nvGrpSpPr>
-        <p:cNvPr id="1" name=""/>
-        <p:cNvGrpSpPr/>
-        <p:nvPr/>
-      </p:nvGrpSpPr>
-      <p:grpSpPr>
-        <a:xfrm>
-          <a:off x="0" y="0"/>
-          <a:ext cx="0" cy="0"/>
-          <a:chOff x="0" y="0"/>
-          <a:chExt cx="0" cy="0"/>
-        </a:xfrm>
-      </p:grpSpPr>
-      <p:pic>
-        <p:nvPicPr>
-          <p:cNvPr id="2" name="Image 0" descr="https://kimi-web-img.moonshot.cn/img/cdn.vectorstock.com/dedad187e3b8b75d7280f5258cc0995ef815e5ed.jpg">    </p:cNvPr>
-          <p:cNvPicPr>
-            <a:picLocks noChangeAspect="1"/>
-          </p:cNvPicPr>
-          <p:nvPr/>
-        </p:nvPicPr>
-        <p:blipFill>
-          <a:blip r:embed="rId1">
-            <a:alphaModFix amt="15000"/>
-          </a:blip>
-          <a:srcRect l="0" r="0" t="23958" b="23958"/>
-          <a:stretch/>
-        </p:blipFill>
-        <p:spPr>
-          <a:xfrm>
-            <a:off x="0" y="0"/>
-            <a:ext cx="12192000" cy="6858000"/>
-          </a:xfrm>
-          <a:prstGeom prst="roundRect">
-            <a:avLst>
-              <a:gd name="adj" fmla="val 0"/>
-            </a:avLst>
-          </a:prstGeom>
-        </p:spPr>
-      </p:pic>
-      <p:sp>
-        <p:nvSpPr>
-          <p:cNvPr id="3" name="Shape 0"/>
-          <p:cNvSpPr/>
-          <p:nvPr/>
-        </p:nvSpPr>
-        <p:spPr>
-          <a:xfrm>
-            <a:off x="0" y="0"/>
-            <a:ext cx="12192000" cy="6858000"/>
-          </a:xfrm>
-          <a:custGeom>
-            <a:avLst/>
-            <a:gdLst/>
-            <a:ahLst/>
-            <a:cxnLst/>
-            <a:rect l="l" t="t" r="r" b="b"/>
-            <a:pathLst>
-              <a:path w="12192000" h="6858000">
-                <a:moveTo>
-                  <a:pt x="0" y="0"/>
-                </a:moveTo>
-                <a:lnTo>
-                  <a:pt x="12192000" y="0"/>
-                </a:lnTo>
-                <a:lnTo>
-                  <a:pt x="12192000" y="6858000"/>
-                </a:lnTo>
-                <a:lnTo>
-                  <a:pt x="0" y="6858000"/>
-                </a:lnTo>
-                <a:lnTo>
-                  <a:pt x="0" y="0"/>
-                </a:lnTo>
-                <a:close/>
-              </a:path>
-            </a:pathLst>
-          </a:custGeom>
-          <a:solidFill>
-            <a:srgbClr val="FFFFFF">
-              <a:alpha val="90000"/>
-            </a:srgbClr>
-          </a:solidFill>
-          <a:ln/>
-        </p:spPr>
-      </p:sp>
-      <p:sp>
-        <p:nvSpPr>
-          <p:cNvPr id="4" name="Shape 1"/>
-          <p:cNvSpPr/>
-          <p:nvPr/>
-        </p:nvSpPr>
-        <p:spPr>
-          <a:xfrm>
-            <a:off x="6200775" y="781050"/>
-            <a:ext cx="5581650" cy="3962400"/>
-          </a:xfrm>
-          <a:custGeom>
-            <a:avLst/>
-            <a:gdLst/>
-            <a:ahLst/>
-            <a:cxnLst/>
-            <a:rect l="l" t="t" r="r" b="b"/>
-            <a:pathLst>
-              <a:path w="5581650" h="3962400">
-                <a:moveTo>
-                  <a:pt x="0" y="0"/>
-                </a:moveTo>
-                <a:lnTo>
-                  <a:pt x="5581650" y="0"/>
-                </a:lnTo>
-                <a:lnTo>
-                  <a:pt x="5581650" y="3962400"/>
-                </a:lnTo>
-                <a:lnTo>
-                  <a:pt x="0" y="3962400"/>
-                </a:lnTo>
-                <a:lnTo>
-                  <a:pt x="0" y="0"/>
-                </a:lnTo>
-                <a:close/>
-              </a:path>
-            </a:pathLst>
-          </a:custGeom>
-          <a:solidFill>
-            <a:srgbClr val="FFFFFF"/>
-          </a:solidFill>
-          <a:ln w="76200">
-            <a:solidFill>
-              <a:srgbClr val="000000"/>
-            </a:solidFill>
-            <a:prstDash val="solid"/>
-          </a:ln>
-          <a:effectLst>
-            <a:outerShdw sx="100000" sy="100000" kx="0" ky="0" algn="bl" rotWithShape="0" blurRad="101600" dist="76200" dir="2700000">
-              <a:srgbClr val="000000">
-                <a:alpha val="100000"/>
-              </a:srgbClr>
-            </a:outerShdw>
-          </a:effectLst>
-        </p:spPr>
-      </p:sp>
-      <p:sp>
-        <p:nvSpPr>
-          <p:cNvPr id="5" name="Shape 2"/>
-          <p:cNvSpPr/>
-          <p:nvPr/>
-        </p:nvSpPr>
-        <p:spPr>
-          <a:xfrm>
-            <a:off x="10077450" y="1266825"/>
-            <a:ext cx="76200" cy="914400"/>
-          </a:xfrm>
-          <a:custGeom>
-            <a:avLst/>
-            <a:gdLst/>
-            <a:ahLst/>
-            <a:cxnLst/>
-            <a:rect l="l" t="t" r="r" b="b"/>
-            <a:pathLst>
-              <a:path w="76200" h="914400">
-                <a:moveTo>
-                  <a:pt x="0" y="0"/>
-                </a:moveTo>
-                <a:lnTo>
-                  <a:pt x="76200" y="0"/>
-                </a:lnTo>
-                <a:lnTo>
-                  <a:pt x="76200" y="914400"/>
-                </a:lnTo>
-                <a:lnTo>
-                  <a:pt x="0" y="914400"/>
-                </a:lnTo>
-                <a:lnTo>
-                  <a:pt x="0" y="0"/>
-                </a:lnTo>
-                <a:close/>
-              </a:path>
-            </a:pathLst>
-          </a:custGeom>
-          <a:solidFill>
-            <a:srgbClr val="000000"/>
-          </a:solidFill>
-          <a:ln/>
-        </p:spPr>
-      </p:sp>
-      <p:sp>
-        <p:nvSpPr>
-          <p:cNvPr id="6" name="Shape 3"/>
-          <p:cNvSpPr/>
-          <p:nvPr/>
-        </p:nvSpPr>
-        <p:spPr>
-          <a:xfrm>
-            <a:off x="10410825" y="1295400"/>
-            <a:ext cx="857250" cy="857250"/>
-          </a:xfrm>
-          <a:custGeom>
-            <a:avLst/>
-            <a:gdLst/>
-            <a:ahLst/>
-            <a:cxnLst/>
-            <a:rect l="l" t="t" r="r" b="b"/>
-            <a:pathLst>
-              <a:path w="857250" h="857250">
-                <a:moveTo>
-                  <a:pt x="0" y="0"/>
-                </a:moveTo>
-                <a:lnTo>
-                  <a:pt x="857250" y="0"/>
-                </a:lnTo>
-                <a:lnTo>
-                  <a:pt x="857250" y="857250"/>
-                </a:lnTo>
-                <a:lnTo>
-                  <a:pt x="0" y="857250"/>
-                </a:lnTo>
-                <a:lnTo>
-                  <a:pt x="0" y="0"/>
-                </a:lnTo>
-                <a:close/>
-              </a:path>
-            </a:pathLst>
-          </a:custGeom>
-          <a:solidFill>
-            <a:srgbClr val="000000"/>
-          </a:solidFill>
-          <a:ln w="76200">
-            <a:solidFill>
-              <a:srgbClr val="000000"/>
-            </a:solidFill>
-            <a:prstDash val="solid"/>
-          </a:ln>
-        </p:spPr>
-      </p:sp>
-      <p:sp>
-        <p:nvSpPr>
-          <p:cNvPr id="7" name="Text 4"/>
-          <p:cNvSpPr/>
-          <p:nvPr/>
-        </p:nvSpPr>
-        <p:spPr>
-          <a:xfrm>
-            <a:off x="10267950" y="1266825"/>
-            <a:ext cx="1028700" cy="800100"/>
-          </a:xfrm>
-          <a:prstGeom prst="rect">
-            <a:avLst/>
-          </a:prstGeom>
-          <a:noFill/>
-          <a:ln/>
-        </p:spPr>
-        <p:txBody>
-          <a:bodyPr wrap="square" lIns="0" tIns="0" rIns="0" bIns="0" rtlCol="0" anchor="ctr"/>
-          <a:lstStyle/>
-          <a:p>
-            <a:pPr algn="ctr">
-              <a:lnSpc>
-                <a:spcPct val="80000"/>
-              </a:lnSpc>
-            </a:pPr>
-            <a:r>
-              <a:rPr lang="en-US" sz="3600" b="1" dirty="0">
-                <a:solidFill>
-                  <a:srgbClr val="FFFFFF"/>
-                </a:solidFill>
-                <a:latin typeface="Noto Sans SC" pitchFamily="34" charset="0"/>
-                <a:ea typeface="Noto Sans SC" pitchFamily="34" charset="-122"/>
-                <a:cs typeface="Noto Sans SC" pitchFamily="34" charset="-120"/>
-              </a:rPr>
-              <a:t>12</a:t>
-            </a:r>
-            <a:endParaRPr lang="en-US" sz="1600" dirty="0"/>
-          </a:p>
-        </p:txBody>
-      </p:sp>
-      <p:sp>
-        <p:nvSpPr>
-          <p:cNvPr id="8" name="Text 5"/>
-          <p:cNvSpPr/>
-          <p:nvPr/>
-        </p:nvSpPr>
-        <p:spPr>
-          <a:xfrm>
-            <a:off x="6343650" y="2486025"/>
-            <a:ext cx="4953000" cy="857250"/>
-          </a:xfrm>
-          <a:prstGeom prst="rect">
-            <a:avLst/>
-          </a:prstGeom>
-          <a:noFill/>
-          <a:ln/>
-        </p:spPr>
-        <p:txBody>
-          <a:bodyPr wrap="square" lIns="0" tIns="0" rIns="0" bIns="0" rtlCol="0" anchor="ctr"/>
-          <a:lstStyle/>
-          <a:p>
-            <a:pPr algn="r">
-              <a:lnSpc>
-                <a:spcPct val="100000"/>
-              </a:lnSpc>
-            </a:pPr>
-            <a:r>
-              <a:rPr lang="en-US" sz="5400" b="1" dirty="0">
-                <a:solidFill>
-                  <a:srgbClr val="000000"/>
-                </a:solidFill>
-                <a:latin typeface="Noto Sans SC" pitchFamily="34" charset="0"/>
-                <a:ea typeface="Noto Sans SC" pitchFamily="34" charset="-122"/>
-                <a:cs typeface="Noto Sans SC" pitchFamily="34" charset="-120"/>
-              </a:rPr>
-              <a:t>CONCLUSION</a:t>
-            </a:r>
-            <a:endParaRPr lang="en-US" sz="1600" dirty="0"/>
-          </a:p>
-        </p:txBody>
-      </p:sp>
-      <p:sp>
-        <p:nvSpPr>
-          <p:cNvPr id="9" name="Shape 6"/>
-          <p:cNvSpPr/>
-          <p:nvPr/>
-        </p:nvSpPr>
-        <p:spPr>
-          <a:xfrm>
-            <a:off x="9467850" y="3571875"/>
-            <a:ext cx="1828800" cy="76200"/>
-          </a:xfrm>
-          <a:custGeom>
-            <a:avLst/>
-            <a:gdLst/>
-            <a:ahLst/>
-            <a:cxnLst/>
-            <a:rect l="l" t="t" r="r" b="b"/>
-            <a:pathLst>
-              <a:path w="1828800" h="76200">
-                <a:moveTo>
-                  <a:pt x="0" y="0"/>
-                </a:moveTo>
-                <a:lnTo>
-                  <a:pt x="1828800" y="0"/>
-                </a:lnTo>
-                <a:lnTo>
-                  <a:pt x="1828800" y="76200"/>
-                </a:lnTo>
-                <a:lnTo>
-                  <a:pt x="0" y="76200"/>
-                </a:lnTo>
-                <a:lnTo>
-                  <a:pt x="0" y="0"/>
-                </a:lnTo>
-                <a:close/>
-              </a:path>
-            </a:pathLst>
-          </a:custGeom>
-          <a:solidFill>
-            <a:srgbClr val="000000"/>
-          </a:solidFill>
-          <a:ln/>
-        </p:spPr>
-      </p:sp>
-      <p:sp>
-        <p:nvSpPr>
-          <p:cNvPr id="10" name="Text 7"/>
-          <p:cNvSpPr/>
-          <p:nvPr/>
-        </p:nvSpPr>
-        <p:spPr>
-          <a:xfrm>
-            <a:off x="6515100" y="3876675"/>
-            <a:ext cx="4781550" cy="381000"/>
-          </a:xfrm>
-          <a:prstGeom prst="rect">
-            <a:avLst/>
-          </a:prstGeom>
-          <a:noFill/>
-          <a:ln/>
-        </p:spPr>
-        <p:txBody>
-          <a:bodyPr wrap="square" lIns="0" tIns="0" rIns="0" bIns="0" rtlCol="0" anchor="ctr"/>
-          <a:lstStyle/>
-          <a:p>
-            <a:pPr algn="r">
-              <a:lnSpc>
-                <a:spcPct val="90000"/>
-              </a:lnSpc>
-            </a:pPr>
-            <a:r>
-              <a:rPr lang="en-US" sz="2700" b="1" dirty="0">
-                <a:solidFill>
-                  <a:srgbClr val="000000"/>
-                </a:solidFill>
-                <a:latin typeface="Noto Sans SC" pitchFamily="34" charset="0"/>
-                <a:ea typeface="Noto Sans SC" pitchFamily="34" charset="-122"/>
-                <a:cs typeface="Noto Sans SC" pitchFamily="34" charset="-120"/>
-              </a:rPr>
-              <a:t>The Path Forward</a:t>
-            </a:r>
-            <a:endParaRPr lang="en-US" sz="1600" dirty="0"/>
-          </a:p>
-        </p:txBody>
-      </p:sp>
-      <p:sp>
-        <p:nvSpPr>
-          <p:cNvPr id="11" name="Shape 8"/>
-          <p:cNvSpPr/>
-          <p:nvPr/>
-        </p:nvSpPr>
-        <p:spPr>
-          <a:xfrm>
-            <a:off x="7382991" y="5257800"/>
-            <a:ext cx="4400550" cy="819150"/>
-          </a:xfrm>
-          <a:custGeom>
-            <a:avLst/>
-            <a:gdLst/>
-            <a:ahLst/>
-            <a:cxnLst/>
-            <a:rect l="l" t="t" r="r" b="b"/>
-            <a:pathLst>
-              <a:path w="4400550" h="819150">
-                <a:moveTo>
-                  <a:pt x="0" y="0"/>
-                </a:moveTo>
-                <a:lnTo>
-                  <a:pt x="4400550" y="0"/>
-                </a:lnTo>
-                <a:lnTo>
-                  <a:pt x="4400550" y="819150"/>
-                </a:lnTo>
-                <a:lnTo>
-                  <a:pt x="0" y="819150"/>
-                </a:lnTo>
-                <a:lnTo>
-                  <a:pt x="0" y="0"/>
-                </a:lnTo>
-                <a:close/>
-              </a:path>
-            </a:pathLst>
-          </a:custGeom>
-          <a:solidFill>
-            <a:srgbClr val="FFFFFF"/>
-          </a:solidFill>
-          <a:ln w="76200">
-            <a:solidFill>
-              <a:srgbClr val="000000"/>
-            </a:solidFill>
-            <a:prstDash val="solid"/>
-          </a:ln>
-        </p:spPr>
-      </p:sp>
-      <p:sp>
-        <p:nvSpPr>
-          <p:cNvPr id="12" name="Text 9"/>
-          <p:cNvSpPr/>
-          <p:nvPr/>
-        </p:nvSpPr>
-        <p:spPr>
-          <a:xfrm>
-            <a:off x="7640166" y="5514975"/>
-            <a:ext cx="4000500" cy="304800"/>
-          </a:xfrm>
-          <a:prstGeom prst="rect">
-            <a:avLst/>
-          </a:prstGeom>
-          <a:noFill/>
-          <a:ln/>
-        </p:spPr>
-        <p:txBody>
-          <a:bodyPr wrap="square" lIns="0" tIns="0" rIns="0" bIns="0" rtlCol="0" anchor="ctr"/>
-          <a:lstStyle/>
-          <a:p>
-            <a:pPr>
-              <a:lnSpc>
-                <a:spcPct val="110000"/>
-              </a:lnSpc>
-            </a:pPr>
-            <a:r>
-              <a:rPr lang="en-US" sz="1800" b="1" dirty="0">
-                <a:solidFill>
-                  <a:srgbClr val="000000"/>
-                </a:solidFill>
-                <a:latin typeface="Noto Sans SC" pitchFamily="34" charset="0"/>
-                <a:ea typeface="Noto Sans SC" pitchFamily="34" charset="-122"/>
-                <a:cs typeface="Noto Sans SC" pitchFamily="34" charset="-120"/>
-              </a:rPr>
-              <a:t>▶ Key Takeaways &amp; Final Thoughts</a:t>
-            </a:r>
-            <a:endParaRPr lang="en-US" sz="1600" dirty="0"/>
-          </a:p>
-        </p:txBody>
-      </p:sp>
-    </p:spTree>
-  </p:cSld>
-  <p:clrMapOvr>
-    <a:masterClrMapping/>
-  </p:clrMapOvr>
-</p:sld>
-</file>
-
-<file path=ppt/slides/slide26.xml><?xml version="1.0" encoding="utf-8"?>
-<p:sld xmlns:a="http://schemas.openxmlformats.org/drawingml/2006/main" xmlns:r="http://schemas.openxmlformats.org/officeDocument/2006/relationships" xmlns:p="http://schemas.openxmlformats.org/presentationml/2006/main">
-  <p:cSld name="Slide 26">
-    <p:bg>
-      <p:bgPr>
-        <a:solidFill>
-          <a:srgbClr val="FFFFFF"/>
-        </a:solidFill>
-      </p:bgPr>
-    </p:bg>
-    <p:spTree>
-      <p:nvGrpSpPr>
-        <p:cNvPr id="1" name=""/>
-        <p:cNvGrpSpPr/>
-        <p:nvPr/>
-      </p:nvGrpSpPr>
-      <p:grpSpPr>
-        <a:xfrm>
-          <a:off x="0" y="0"/>
-          <a:ext cx="0" cy="0"/>
-          <a:chOff x="0" y="0"/>
-          <a:chExt cx="0" cy="0"/>
-        </a:xfrm>
-      </p:grpSpPr>
-      <p:sp>
-        <p:nvSpPr>
-          <p:cNvPr id="2" name="Shape 0"/>
-          <p:cNvSpPr/>
-          <p:nvPr/>
-        </p:nvSpPr>
-        <p:spPr>
-          <a:xfrm>
-            <a:off x="341313" y="341313"/>
-            <a:ext cx="11509375" cy="841375"/>
-          </a:xfrm>
-          <a:custGeom>
-            <a:avLst/>
-            <a:gdLst/>
-            <a:ahLst/>
-            <a:cxnLst/>
-            <a:rect l="l" t="t" r="r" b="b"/>
-            <a:pathLst>
-              <a:path w="11509375" h="841375">
-                <a:moveTo>
-                  <a:pt x="0" y="0"/>
-                </a:moveTo>
-                <a:lnTo>
-                  <a:pt x="11509375" y="0"/>
-                </a:lnTo>
-                <a:lnTo>
-                  <a:pt x="11509375" y="841375"/>
-                </a:lnTo>
-                <a:lnTo>
-                  <a:pt x="0" y="841375"/>
-                </a:lnTo>
-                <a:lnTo>
-                  <a:pt x="0" y="0"/>
-                </a:lnTo>
-                <a:close/>
-              </a:path>
-            </a:pathLst>
-          </a:custGeom>
-          <a:solidFill>
-            <a:srgbClr val="FFFFFF"/>
-          </a:solidFill>
-          <a:ln w="76200">
-            <a:solidFill>
-              <a:srgbClr val="000000"/>
-            </a:solidFill>
-            <a:prstDash val="solid"/>
-          </a:ln>
-        </p:spPr>
-      </p:sp>
-      <p:sp>
-        <p:nvSpPr>
-          <p:cNvPr id="3" name="Text 1"/>
-          <p:cNvSpPr/>
-          <p:nvPr/>
-        </p:nvSpPr>
-        <p:spPr>
-          <a:xfrm>
-            <a:off x="523875" y="523875"/>
-            <a:ext cx="11287125" cy="317500"/>
-          </a:xfrm>
-          <a:prstGeom prst="rect">
-            <a:avLst/>
-          </a:prstGeom>
-          <a:noFill/>
-          <a:ln/>
-        </p:spPr>
-        <p:txBody>
-          <a:bodyPr wrap="square" lIns="0" tIns="0" rIns="0" bIns="0" rtlCol="0" anchor="ctr"/>
-          <a:lstStyle/>
-          <a:p>
-            <a:pPr>
-              <a:lnSpc>
-                <a:spcPct val="90000"/>
-              </a:lnSpc>
-            </a:pPr>
-            <a:r>
-              <a:rPr lang="en-US" sz="2250" b="1" dirty="0">
-                <a:solidFill>
-                  <a:srgbClr val="000000"/>
-                </a:solidFill>
-                <a:latin typeface="Noto Sans SC" pitchFamily="34" charset="0"/>
-                <a:ea typeface="Noto Sans SC" pitchFamily="34" charset="-122"/>
-                <a:cs typeface="Noto Sans SC" pitchFamily="34" charset="-120"/>
-              </a:rPr>
-              <a:t>BITCOIN'S TRAJECTORY: KEY TAKEAWAYS</a:t>
-            </a:r>
-            <a:endParaRPr lang="en-US" sz="1600" dirty="0"/>
-          </a:p>
-        </p:txBody>
-      </p:sp>
-      <p:sp>
-        <p:nvSpPr>
-          <p:cNvPr id="4" name="Shape 2"/>
-          <p:cNvSpPr/>
-          <p:nvPr/>
-        </p:nvSpPr>
-        <p:spPr>
-          <a:xfrm>
-            <a:off x="523875" y="936625"/>
-            <a:ext cx="762000" cy="63500"/>
-          </a:xfrm>
-          <a:custGeom>
-            <a:avLst/>
-            <a:gdLst/>
-            <a:ahLst/>
-            <a:cxnLst/>
-            <a:rect l="l" t="t" r="r" b="b"/>
-            <a:pathLst>
-              <a:path w="762000" h="63500">
-                <a:moveTo>
-                  <a:pt x="0" y="0"/>
-                </a:moveTo>
-                <a:lnTo>
-                  <a:pt x="762000" y="0"/>
-                </a:lnTo>
-                <a:lnTo>
-                  <a:pt x="762000" y="63500"/>
-                </a:lnTo>
-                <a:lnTo>
-                  <a:pt x="0" y="63500"/>
-                </a:lnTo>
-                <a:lnTo>
-                  <a:pt x="0" y="0"/>
-                </a:lnTo>
-                <a:close/>
-              </a:path>
-            </a:pathLst>
-          </a:custGeom>
-          <a:solidFill>
-            <a:srgbClr val="000000"/>
-          </a:solidFill>
-          <a:ln/>
-        </p:spPr>
-      </p:sp>
-      <p:sp>
-        <p:nvSpPr>
-          <p:cNvPr id="5" name="Shape 3"/>
-          <p:cNvSpPr/>
-          <p:nvPr/>
-        </p:nvSpPr>
-        <p:spPr>
-          <a:xfrm>
-            <a:off x="341313" y="1357313"/>
-            <a:ext cx="5667375" cy="1587500"/>
-          </a:xfrm>
-          <a:custGeom>
-            <a:avLst/>
-            <a:gdLst/>
-            <a:ahLst/>
-            <a:cxnLst/>
-            <a:rect l="l" t="t" r="r" b="b"/>
-            <a:pathLst>
-              <a:path w="5667375" h="1587500">
-                <a:moveTo>
-                  <a:pt x="0" y="0"/>
-                </a:moveTo>
-                <a:lnTo>
-                  <a:pt x="5667375" y="0"/>
-                </a:lnTo>
-                <a:lnTo>
-                  <a:pt x="5667375" y="1587500"/>
-                </a:lnTo>
-                <a:lnTo>
-                  <a:pt x="0" y="1587500"/>
-                </a:lnTo>
-                <a:lnTo>
-                  <a:pt x="0" y="0"/>
-                </a:lnTo>
-                <a:close/>
-              </a:path>
-            </a:pathLst>
-          </a:custGeom>
-          <a:solidFill>
-            <a:srgbClr val="FFFFFF"/>
-          </a:solidFill>
-          <a:ln w="76200">
-            <a:solidFill>
-              <a:srgbClr val="000000"/>
-            </a:solidFill>
-            <a:prstDash val="solid"/>
-          </a:ln>
-          <a:effectLst>
-            <a:outerShdw sx="100000" sy="100000" kx="0" ky="0" algn="bl" rotWithShape="0" blurRad="101600" dist="63500" dir="2700000">
-              <a:srgbClr val="000000">
-                <a:alpha val="100000"/>
-              </a:srgbClr>
-            </a:outerShdw>
-          </a:effectLst>
-        </p:spPr>
-      </p:sp>
-      <p:sp>
-        <p:nvSpPr>
-          <p:cNvPr id="6" name="Shape 4"/>
-          <p:cNvSpPr/>
-          <p:nvPr/>
-        </p:nvSpPr>
-        <p:spPr>
-          <a:xfrm>
-            <a:off x="547688" y="1563688"/>
-            <a:ext cx="396875" cy="396875"/>
-          </a:xfrm>
-          <a:custGeom>
-            <a:avLst/>
-            <a:gdLst/>
-            <a:ahLst/>
-            <a:cxnLst/>
-            <a:rect l="l" t="t" r="r" b="b"/>
-            <a:pathLst>
-              <a:path w="396875" h="396875">
-                <a:moveTo>
-                  <a:pt x="0" y="0"/>
-                </a:moveTo>
-                <a:lnTo>
-                  <a:pt x="396875" y="0"/>
-                </a:lnTo>
-                <a:lnTo>
-                  <a:pt x="396875" y="396875"/>
-                </a:lnTo>
-                <a:lnTo>
-                  <a:pt x="0" y="396875"/>
-                </a:lnTo>
-                <a:lnTo>
-                  <a:pt x="0" y="0"/>
-                </a:lnTo>
-                <a:close/>
-              </a:path>
-            </a:pathLst>
-          </a:custGeom>
-          <a:solidFill>
-            <a:srgbClr val="000000"/>
-          </a:solidFill>
-          <a:ln w="76200">
-            <a:solidFill>
-              <a:srgbClr val="000000"/>
-            </a:solidFill>
-            <a:prstDash val="solid"/>
-          </a:ln>
-        </p:spPr>
-      </p:sp>
-      <p:sp>
-        <p:nvSpPr>
-          <p:cNvPr id="7" name="Text 5"/>
-          <p:cNvSpPr/>
-          <p:nvPr/>
-        </p:nvSpPr>
-        <p:spPr>
-          <a:xfrm>
-            <a:off x="476250" y="1539875"/>
-            <a:ext cx="444500" cy="349250"/>
-          </a:xfrm>
-          <a:prstGeom prst="rect">
-            <a:avLst/>
-          </a:prstGeom>
-          <a:noFill/>
-          <a:ln/>
-        </p:spPr>
-        <p:txBody>
-          <a:bodyPr wrap="square" lIns="0" tIns="0" rIns="0" bIns="0" rtlCol="0" anchor="ctr"/>
-          <a:lstStyle/>
-          <a:p>
-            <a:pPr algn="ctr">
-              <a:lnSpc>
-                <a:spcPct val="110000"/>
-              </a:lnSpc>
-            </a:pPr>
-            <a:r>
-              <a:rPr lang="en-US" sz="1500" b="1" dirty="0">
-                <a:solidFill>
-                  <a:srgbClr val="FFFFFF"/>
-                </a:solidFill>
-                <a:latin typeface="Noto Sans SC" pitchFamily="34" charset="0"/>
-                <a:ea typeface="Noto Sans SC" pitchFamily="34" charset="-122"/>
-                <a:cs typeface="Noto Sans SC" pitchFamily="34" charset="-120"/>
-              </a:rPr>
-              <a:t>1</a:t>
-            </a:r>
-            <a:endParaRPr lang="en-US" sz="1600" dirty="0"/>
-          </a:p>
-        </p:txBody>
-      </p:sp>
-      <p:sp>
-        <p:nvSpPr>
-          <p:cNvPr id="8" name="Text 6"/>
-          <p:cNvSpPr/>
-          <p:nvPr/>
-        </p:nvSpPr>
-        <p:spPr>
-          <a:xfrm>
-            <a:off x="1095375" y="1539875"/>
-            <a:ext cx="3651250" cy="254000"/>
-          </a:xfrm>
-          <a:prstGeom prst="rect">
-            <a:avLst/>
-          </a:prstGeom>
-          <a:noFill/>
-          <a:ln/>
-        </p:spPr>
-        <p:txBody>
-          <a:bodyPr wrap="square" lIns="0" tIns="0" rIns="0" bIns="0" rtlCol="0" anchor="ctr"/>
-          <a:lstStyle/>
-          <a:p>
-            <a:pPr>
-              <a:lnSpc>
-                <a:spcPct val="110000"/>
-              </a:lnSpc>
-            </a:pPr>
-            <a:r>
-              <a:rPr lang="en-US" sz="1500" b="1" dirty="0">
-                <a:solidFill>
-                  <a:srgbClr val="000000"/>
-                </a:solidFill>
-                <a:latin typeface="Noto Sans SC" pitchFamily="34" charset="0"/>
-                <a:ea typeface="Noto Sans SC" pitchFamily="34" charset="-122"/>
-                <a:cs typeface="Noto Sans SC" pitchFamily="34" charset="-120"/>
-              </a:rPr>
-              <a:t>FROM EXPERIMENT TO ASSET CLASS</a:t>
-            </a:r>
-            <a:endParaRPr lang="en-US" sz="1600" dirty="0"/>
-          </a:p>
-        </p:txBody>
-      </p:sp>
-      <p:sp>
-        <p:nvSpPr>
-          <p:cNvPr id="9" name="Text 7"/>
-          <p:cNvSpPr/>
-          <p:nvPr/>
-        </p:nvSpPr>
-        <p:spPr>
-          <a:xfrm>
-            <a:off x="523875" y="2079625"/>
-            <a:ext cx="5365750" cy="619125"/>
-          </a:xfrm>
-          <a:prstGeom prst="rect">
-            <a:avLst/>
-          </a:prstGeom>
-          <a:noFill/>
-          <a:ln/>
-        </p:spPr>
-        <p:txBody>
-          <a:bodyPr wrap="square" lIns="0" tIns="0" rIns="0" bIns="0" rtlCol="0" anchor="ctr"/>
-          <a:lstStyle/>
-          <a:p>
-            <a:pPr>
-              <a:lnSpc>
-                <a:spcPct val="140000"/>
-              </a:lnSpc>
-            </a:pPr>
-            <a:r>
-              <a:rPr lang="en-US" sz="1000" dirty="0">
-                <a:solidFill>
-                  <a:srgbClr val="000000"/>
-                </a:solidFill>
-                <a:latin typeface="MiSans" pitchFamily="34" charset="0"/>
-                <a:ea typeface="MiSans" pitchFamily="34" charset="-122"/>
-                <a:cs typeface="MiSans" pitchFamily="34" charset="-120"/>
-              </a:rPr>
-              <a:t>Bitcoin has evolved from a cypherpunk experiment to a </a:t>
-            </a:r>
-            <a:pPr>
-              <a:lnSpc>
-                <a:spcPct val="140000"/>
-              </a:lnSpc>
-            </a:pPr>
-            <a:r>
-              <a:rPr lang="en-US" sz="1000" b="1" dirty="0">
-                <a:solidFill>
-                  <a:srgbClr val="000000"/>
-                </a:solidFill>
-                <a:latin typeface="MiSans" pitchFamily="34" charset="0"/>
-                <a:ea typeface="MiSans" pitchFamily="34" charset="-122"/>
-                <a:cs typeface="MiSans" pitchFamily="34" charset="-120"/>
-              </a:rPr>
-              <a:t>globally recognized financial asset</a:t>
-            </a:r>
-            <a:pPr>
-              <a:lnSpc>
-                <a:spcPct val="140000"/>
-              </a:lnSpc>
-            </a:pPr>
-            <a:r>
-              <a:rPr lang="en-US" sz="1000" dirty="0">
-                <a:solidFill>
-                  <a:srgbClr val="000000"/>
-                </a:solidFill>
-                <a:latin typeface="MiSans" pitchFamily="34" charset="0"/>
-                <a:ea typeface="MiSans" pitchFamily="34" charset="-122"/>
-                <a:cs typeface="MiSans" pitchFamily="34" charset="-120"/>
-              </a:rPr>
-              <a:t> with $1.47 trillion market cap. What started as an idea in a whitepaper is now held by institutions, corporations, and nation-states.</a:t>
-            </a:r>
-            <a:endParaRPr lang="en-US" sz="1600" dirty="0"/>
-          </a:p>
-        </p:txBody>
-      </p:sp>
-      <p:sp>
-        <p:nvSpPr>
-          <p:cNvPr id="10" name="Shape 8"/>
-          <p:cNvSpPr/>
-          <p:nvPr/>
-        </p:nvSpPr>
-        <p:spPr>
-          <a:xfrm>
-            <a:off x="6183313" y="1357313"/>
-            <a:ext cx="5667375" cy="1587500"/>
-          </a:xfrm>
-          <a:custGeom>
-            <a:avLst/>
-            <a:gdLst/>
-            <a:ahLst/>
-            <a:cxnLst/>
-            <a:rect l="l" t="t" r="r" b="b"/>
-            <a:pathLst>
-              <a:path w="5667375" h="1587500">
-                <a:moveTo>
-                  <a:pt x="0" y="0"/>
-                </a:moveTo>
-                <a:lnTo>
-                  <a:pt x="5667375" y="0"/>
-                </a:lnTo>
-                <a:lnTo>
-                  <a:pt x="5667375" y="1587500"/>
-                </a:lnTo>
-                <a:lnTo>
-                  <a:pt x="0" y="1587500"/>
-                </a:lnTo>
-                <a:lnTo>
-                  <a:pt x="0" y="0"/>
-                </a:lnTo>
-                <a:close/>
-              </a:path>
-            </a:pathLst>
-          </a:custGeom>
-          <a:solidFill>
-            <a:srgbClr val="FFFFFF"/>
-          </a:solidFill>
-          <a:ln w="76200">
-            <a:solidFill>
-              <a:srgbClr val="000000"/>
-            </a:solidFill>
-            <a:prstDash val="solid"/>
-          </a:ln>
-          <a:effectLst>
-            <a:outerShdw sx="100000" sy="100000" kx="0" ky="0" algn="bl" rotWithShape="0" blurRad="101600" dist="63500" dir="2700000">
-              <a:srgbClr val="000000">
-                <a:alpha val="100000"/>
-              </a:srgbClr>
-            </a:outerShdw>
-          </a:effectLst>
-        </p:spPr>
-      </p:sp>
-      <p:sp>
-        <p:nvSpPr>
-          <p:cNvPr id="11" name="Shape 9"/>
-          <p:cNvSpPr/>
-          <p:nvPr/>
-        </p:nvSpPr>
-        <p:spPr>
-          <a:xfrm>
-            <a:off x="6389688" y="1563688"/>
-            <a:ext cx="396875" cy="396875"/>
-          </a:xfrm>
-          <a:custGeom>
-            <a:avLst/>
-            <a:gdLst/>
-            <a:ahLst/>
-            <a:cxnLst/>
-            <a:rect l="l" t="t" r="r" b="b"/>
-            <a:pathLst>
-              <a:path w="396875" h="396875">
-                <a:moveTo>
-                  <a:pt x="0" y="0"/>
-                </a:moveTo>
-                <a:lnTo>
-                  <a:pt x="396875" y="0"/>
-                </a:lnTo>
-                <a:lnTo>
-                  <a:pt x="396875" y="396875"/>
-                </a:lnTo>
-                <a:lnTo>
-                  <a:pt x="0" y="396875"/>
-                </a:lnTo>
-                <a:lnTo>
-                  <a:pt x="0" y="0"/>
-                </a:lnTo>
-                <a:close/>
-              </a:path>
-            </a:pathLst>
-          </a:custGeom>
-          <a:solidFill>
-            <a:srgbClr val="000000"/>
-          </a:solidFill>
-          <a:ln w="76200">
-            <a:solidFill>
-              <a:srgbClr val="000000"/>
-            </a:solidFill>
-            <a:prstDash val="solid"/>
-          </a:ln>
-        </p:spPr>
-      </p:sp>
-      <p:sp>
-        <p:nvSpPr>
-          <p:cNvPr id="12" name="Text 10"/>
-          <p:cNvSpPr/>
-          <p:nvPr/>
-        </p:nvSpPr>
-        <p:spPr>
-          <a:xfrm>
-            <a:off x="6318250" y="1539875"/>
-            <a:ext cx="444500" cy="349250"/>
-          </a:xfrm>
-          <a:prstGeom prst="rect">
-            <a:avLst/>
-          </a:prstGeom>
-          <a:noFill/>
-          <a:ln/>
-        </p:spPr>
-        <p:txBody>
-          <a:bodyPr wrap="square" lIns="0" tIns="0" rIns="0" bIns="0" rtlCol="0" anchor="ctr"/>
-          <a:lstStyle/>
-          <a:p>
-            <a:pPr algn="ctr">
-              <a:lnSpc>
-                <a:spcPct val="110000"/>
-              </a:lnSpc>
-            </a:pPr>
-            <a:r>
-              <a:rPr lang="en-US" sz="1500" b="1" dirty="0">
-                <a:solidFill>
-                  <a:srgbClr val="FFFFFF"/>
-                </a:solidFill>
-                <a:latin typeface="Noto Sans SC" pitchFamily="34" charset="0"/>
-                <a:ea typeface="Noto Sans SC" pitchFamily="34" charset="-122"/>
-                <a:cs typeface="Noto Sans SC" pitchFamily="34" charset="-120"/>
-              </a:rPr>
-              <a:t>2</a:t>
-            </a:r>
-            <a:endParaRPr lang="en-US" sz="1600" dirty="0"/>
-          </a:p>
-        </p:txBody>
-      </p:sp>
-      <p:sp>
-        <p:nvSpPr>
-          <p:cNvPr id="13" name="Text 11"/>
-          <p:cNvSpPr/>
-          <p:nvPr/>
-        </p:nvSpPr>
-        <p:spPr>
-          <a:xfrm>
-            <a:off x="6937375" y="1539875"/>
-            <a:ext cx="4826000" cy="508000"/>
-          </a:xfrm>
-          <a:prstGeom prst="rect">
-            <a:avLst/>
-          </a:prstGeom>
-          <a:noFill/>
-          <a:ln/>
-        </p:spPr>
-        <p:txBody>
-          <a:bodyPr wrap="square" lIns="0" tIns="0" rIns="0" bIns="0" rtlCol="0" anchor="ctr"/>
-          <a:lstStyle/>
-          <a:p>
-            <a:pPr>
-              <a:lnSpc>
-                <a:spcPct val="110000"/>
-              </a:lnSpc>
-            </a:pPr>
-            <a:r>
-              <a:rPr lang="en-US" sz="1500" b="1" dirty="0">
-                <a:solidFill>
-                  <a:srgbClr val="000000"/>
-                </a:solidFill>
-                <a:latin typeface="Noto Sans SC" pitchFamily="34" charset="0"/>
-                <a:ea typeface="Noto Sans SC" pitchFamily="34" charset="-122"/>
-                <a:cs typeface="Noto Sans SC" pitchFamily="34" charset="-120"/>
-              </a:rPr>
-              <a:t>INSTITUTIONAL ADOPTION CROSSED THE RUBICON</a:t>
-            </a:r>
-            <a:endParaRPr lang="en-US" sz="1600" dirty="0"/>
-          </a:p>
-        </p:txBody>
-      </p:sp>
-      <p:sp>
-        <p:nvSpPr>
-          <p:cNvPr id="14" name="Text 12"/>
-          <p:cNvSpPr/>
-          <p:nvPr/>
-        </p:nvSpPr>
-        <p:spPr>
-          <a:xfrm>
-            <a:off x="6365875" y="2143125"/>
-            <a:ext cx="5365750" cy="619125"/>
-          </a:xfrm>
-          <a:prstGeom prst="rect">
-            <a:avLst/>
-          </a:prstGeom>
-          <a:noFill/>
-          <a:ln/>
-        </p:spPr>
-        <p:txBody>
-          <a:bodyPr wrap="square" lIns="0" tIns="0" rIns="0" bIns="0" rtlCol="0" anchor="ctr"/>
-          <a:lstStyle/>
-          <a:p>
-            <a:pPr>
-              <a:lnSpc>
-                <a:spcPct val="140000"/>
-              </a:lnSpc>
-            </a:pPr>
-            <a:r>
-              <a:rPr lang="en-US" sz="1000" dirty="0">
-                <a:solidFill>
-                  <a:srgbClr val="000000"/>
-                </a:solidFill>
-                <a:latin typeface="MiSans" pitchFamily="34" charset="0"/>
-                <a:ea typeface="MiSans" pitchFamily="34" charset="-122"/>
-                <a:cs typeface="MiSans" pitchFamily="34" charset="-120"/>
-              </a:rPr>
-              <a:t>The January 2024 ETF approval was a </a:t>
-            </a:r>
-            <a:pPr>
-              <a:lnSpc>
-                <a:spcPct val="140000"/>
-              </a:lnSpc>
-            </a:pPr>
-            <a:r>
-              <a:rPr lang="en-US" sz="1000" b="1" dirty="0">
-                <a:solidFill>
-                  <a:srgbClr val="000000"/>
-                </a:solidFill>
-                <a:latin typeface="MiSans" pitchFamily="34" charset="0"/>
-                <a:ea typeface="MiSans" pitchFamily="34" charset="-122"/>
-                <a:cs typeface="MiSans" pitchFamily="34" charset="-120"/>
-              </a:rPr>
-              <a:t>watershed moment</a:t>
-            </a:r>
-            <a:pPr>
-              <a:lnSpc>
-                <a:spcPct val="140000"/>
-              </a:lnSpc>
-            </a:pPr>
-            <a:r>
-              <a:rPr lang="en-US" sz="1000" dirty="0">
-                <a:solidFill>
-                  <a:srgbClr val="000000"/>
-                </a:solidFill>
-                <a:latin typeface="MiSans" pitchFamily="34" charset="0"/>
-                <a:ea typeface="MiSans" pitchFamily="34" charset="-122"/>
-                <a:cs typeface="MiSans" pitchFamily="34" charset="-120"/>
-              </a:rPr>
-              <a:t>. Wall Street has embraced Bitcoin, with $85B+ in ETF AUM, corporate treasury strategies, and major banks offering crypto services. This genie cannot be put back in the bottle.</a:t>
-            </a:r>
-            <a:endParaRPr lang="en-US" sz="1600" dirty="0"/>
-          </a:p>
-        </p:txBody>
-      </p:sp>
-      <p:sp>
-        <p:nvSpPr>
-          <p:cNvPr id="15" name="Shape 13"/>
-          <p:cNvSpPr/>
-          <p:nvPr/>
-        </p:nvSpPr>
-        <p:spPr>
-          <a:xfrm>
-            <a:off x="341313" y="3119438"/>
-            <a:ext cx="5667375" cy="1587500"/>
-          </a:xfrm>
-          <a:custGeom>
-            <a:avLst/>
-            <a:gdLst/>
-            <a:ahLst/>
-            <a:cxnLst/>
-            <a:rect l="l" t="t" r="r" b="b"/>
-            <a:pathLst>
-              <a:path w="5667375" h="1587500">
-                <a:moveTo>
-                  <a:pt x="0" y="0"/>
-                </a:moveTo>
-                <a:lnTo>
-                  <a:pt x="5667375" y="0"/>
-                </a:lnTo>
-                <a:lnTo>
-                  <a:pt x="5667375" y="1587500"/>
-                </a:lnTo>
-                <a:lnTo>
-                  <a:pt x="0" y="1587500"/>
-                </a:lnTo>
-                <a:lnTo>
-                  <a:pt x="0" y="0"/>
-                </a:lnTo>
-                <a:close/>
-              </a:path>
-            </a:pathLst>
-          </a:custGeom>
-          <a:solidFill>
-            <a:srgbClr val="FFFFFF"/>
-          </a:solidFill>
-          <a:ln w="76200">
-            <a:solidFill>
-              <a:srgbClr val="000000"/>
-            </a:solidFill>
-            <a:prstDash val="solid"/>
-          </a:ln>
-          <a:effectLst>
-            <a:outerShdw sx="100000" sy="100000" kx="0" ky="0" algn="bl" rotWithShape="0" blurRad="101600" dist="63500" dir="2700000">
-              <a:srgbClr val="000000">
-                <a:alpha val="100000"/>
-              </a:srgbClr>
-            </a:outerShdw>
-          </a:effectLst>
-        </p:spPr>
-      </p:sp>
-      <p:sp>
-        <p:nvSpPr>
-          <p:cNvPr id="16" name="Shape 14"/>
-          <p:cNvSpPr/>
-          <p:nvPr/>
-        </p:nvSpPr>
-        <p:spPr>
-          <a:xfrm>
-            <a:off x="547688" y="3325813"/>
-            <a:ext cx="396875" cy="396875"/>
-          </a:xfrm>
-          <a:custGeom>
-            <a:avLst/>
-            <a:gdLst/>
-            <a:ahLst/>
-            <a:cxnLst/>
-            <a:rect l="l" t="t" r="r" b="b"/>
-            <a:pathLst>
-              <a:path w="396875" h="396875">
-                <a:moveTo>
-                  <a:pt x="0" y="0"/>
-                </a:moveTo>
-                <a:lnTo>
-                  <a:pt x="396875" y="0"/>
-                </a:lnTo>
-                <a:lnTo>
-                  <a:pt x="396875" y="396875"/>
-                </a:lnTo>
-                <a:lnTo>
-                  <a:pt x="0" y="396875"/>
-                </a:lnTo>
-                <a:lnTo>
-                  <a:pt x="0" y="0"/>
-                </a:lnTo>
-                <a:close/>
-              </a:path>
-            </a:pathLst>
-          </a:custGeom>
-          <a:solidFill>
-            <a:srgbClr val="000000"/>
-          </a:solidFill>
-          <a:ln w="76200">
-            <a:solidFill>
-              <a:srgbClr val="000000"/>
-            </a:solidFill>
-            <a:prstDash val="solid"/>
-          </a:ln>
-        </p:spPr>
-      </p:sp>
-      <p:sp>
-        <p:nvSpPr>
-          <p:cNvPr id="17" name="Text 15"/>
-          <p:cNvSpPr/>
-          <p:nvPr/>
-        </p:nvSpPr>
-        <p:spPr>
-          <a:xfrm>
-            <a:off x="476250" y="3302000"/>
-            <a:ext cx="444500" cy="349250"/>
-          </a:xfrm>
-          <a:prstGeom prst="rect">
-            <a:avLst/>
-          </a:prstGeom>
-          <a:noFill/>
-          <a:ln/>
-        </p:spPr>
-        <p:txBody>
-          <a:bodyPr wrap="square" lIns="0" tIns="0" rIns="0" bIns="0" rtlCol="0" anchor="ctr"/>
-          <a:lstStyle/>
-          <a:p>
-            <a:pPr algn="ctr">
-              <a:lnSpc>
-                <a:spcPct val="110000"/>
-              </a:lnSpc>
-            </a:pPr>
-            <a:r>
-              <a:rPr lang="en-US" sz="1500" b="1" dirty="0">
-                <a:solidFill>
-                  <a:srgbClr val="FFFFFF"/>
-                </a:solidFill>
-                <a:latin typeface="Noto Sans SC" pitchFamily="34" charset="0"/>
-                <a:ea typeface="Noto Sans SC" pitchFamily="34" charset="-122"/>
-                <a:cs typeface="Noto Sans SC" pitchFamily="34" charset="-120"/>
-              </a:rPr>
-              <a:t>3</a:t>
-            </a:r>
-            <a:endParaRPr lang="en-US" sz="1600" dirty="0"/>
-          </a:p>
-        </p:txBody>
-      </p:sp>
-      <p:sp>
-        <p:nvSpPr>
-          <p:cNvPr id="18" name="Text 16"/>
-          <p:cNvSpPr/>
-          <p:nvPr/>
-        </p:nvSpPr>
-        <p:spPr>
-          <a:xfrm>
-            <a:off x="1095375" y="3302000"/>
-            <a:ext cx="4826000" cy="508000"/>
-          </a:xfrm>
-          <a:prstGeom prst="rect">
-            <a:avLst/>
-          </a:prstGeom>
-          <a:noFill/>
-          <a:ln/>
-        </p:spPr>
-        <p:txBody>
-          <a:bodyPr wrap="square" lIns="0" tIns="0" rIns="0" bIns="0" rtlCol="0" anchor="ctr"/>
-          <a:lstStyle/>
-          <a:p>
-            <a:pPr>
-              <a:lnSpc>
-                <a:spcPct val="110000"/>
-              </a:lnSpc>
-            </a:pPr>
-            <a:r>
-              <a:rPr lang="en-US" sz="1500" b="1" dirty="0">
-                <a:solidFill>
-                  <a:srgbClr val="000000"/>
-                </a:solidFill>
-                <a:latin typeface="Noto Sans SC" pitchFamily="34" charset="0"/>
-                <a:ea typeface="Noto Sans SC" pitchFamily="34" charset="-122"/>
-                <a:cs typeface="Noto Sans SC" pitchFamily="34" charset="-120"/>
-              </a:rPr>
-              <a:t>HALVING CYCLES CREATE PREDICTABLE PATTERNS</a:t>
-            </a:r>
-            <a:endParaRPr lang="en-US" sz="1600" dirty="0"/>
-          </a:p>
-        </p:txBody>
-      </p:sp>
-      <p:sp>
-        <p:nvSpPr>
-          <p:cNvPr id="19" name="Text 17"/>
-          <p:cNvSpPr/>
-          <p:nvPr/>
-        </p:nvSpPr>
-        <p:spPr>
-          <a:xfrm>
-            <a:off x="523875" y="3905250"/>
-            <a:ext cx="5365750" cy="619125"/>
-          </a:xfrm>
-          <a:prstGeom prst="rect">
-            <a:avLst/>
-          </a:prstGeom>
-          <a:noFill/>
-          <a:ln/>
-        </p:spPr>
-        <p:txBody>
-          <a:bodyPr wrap="square" lIns="0" tIns="0" rIns="0" bIns="0" rtlCol="0" anchor="ctr"/>
-          <a:lstStyle/>
-          <a:p>
-            <a:pPr>
-              <a:lnSpc>
-                <a:spcPct val="140000"/>
-              </a:lnSpc>
-            </a:pPr>
-            <a:r>
-              <a:rPr lang="en-US" sz="1000" dirty="0">
-                <a:solidFill>
-                  <a:srgbClr val="000000"/>
-                </a:solidFill>
-                <a:latin typeface="MiSans" pitchFamily="34" charset="0"/>
-                <a:ea typeface="MiSans" pitchFamily="34" charset="-122"/>
-                <a:cs typeface="MiSans" pitchFamily="34" charset="-120"/>
-              </a:rPr>
-              <a:t>The programmed scarcity mechanism has </a:t>
-            </a:r>
-            <a:pPr>
-              <a:lnSpc>
-                <a:spcPct val="140000"/>
-              </a:lnSpc>
-            </a:pPr>
-            <a:r>
-              <a:rPr lang="en-US" sz="1000" b="1" dirty="0">
-                <a:solidFill>
-                  <a:srgbClr val="000000"/>
-                </a:solidFill>
-                <a:latin typeface="MiSans" pitchFamily="34" charset="0"/>
-                <a:ea typeface="MiSans" pitchFamily="34" charset="-122"/>
-                <a:cs typeface="MiSans" pitchFamily="34" charset="-120"/>
-              </a:rPr>
-              <a:t>historically preceded major bull runs</a:t>
-            </a:r>
-            <a:pPr>
-              <a:lnSpc>
-                <a:spcPct val="140000"/>
-              </a:lnSpc>
-            </a:pPr>
-            <a:r>
-              <a:rPr lang="en-US" sz="1000" dirty="0">
-                <a:solidFill>
-                  <a:srgbClr val="000000"/>
-                </a:solidFill>
-                <a:latin typeface="MiSans" pitchFamily="34" charset="0"/>
-                <a:ea typeface="MiSans" pitchFamily="34" charset="-122"/>
-                <a:cs typeface="MiSans" pitchFamily="34" charset="-120"/>
-              </a:rPr>
-              <a:t>. The 2024 halving reduced daily new supply to 450 BTC (0.85% inflation), setting the stage for the next supply-demand imbalance.</a:t>
-            </a:r>
-            <a:endParaRPr lang="en-US" sz="1600" dirty="0"/>
-          </a:p>
-        </p:txBody>
-      </p:sp>
-      <p:sp>
-        <p:nvSpPr>
-          <p:cNvPr id="20" name="Shape 18"/>
-          <p:cNvSpPr/>
-          <p:nvPr/>
-        </p:nvSpPr>
-        <p:spPr>
-          <a:xfrm>
-            <a:off x="6183313" y="3119438"/>
-            <a:ext cx="5667375" cy="1587500"/>
-          </a:xfrm>
-          <a:custGeom>
-            <a:avLst/>
-            <a:gdLst/>
-            <a:ahLst/>
-            <a:cxnLst/>
-            <a:rect l="l" t="t" r="r" b="b"/>
-            <a:pathLst>
-              <a:path w="5667375" h="1587500">
-                <a:moveTo>
-                  <a:pt x="0" y="0"/>
-                </a:moveTo>
-                <a:lnTo>
-                  <a:pt x="5667375" y="0"/>
-                </a:lnTo>
-                <a:lnTo>
-                  <a:pt x="5667375" y="1587500"/>
-                </a:lnTo>
-                <a:lnTo>
-                  <a:pt x="0" y="1587500"/>
-                </a:lnTo>
-                <a:lnTo>
-                  <a:pt x="0" y="0"/>
-                </a:lnTo>
-                <a:close/>
-              </a:path>
-            </a:pathLst>
-          </a:custGeom>
-          <a:solidFill>
-            <a:srgbClr val="FFFFFF"/>
-          </a:solidFill>
-          <a:ln w="76200">
-            <a:solidFill>
-              <a:srgbClr val="000000"/>
-            </a:solidFill>
-            <a:prstDash val="solid"/>
-          </a:ln>
-          <a:effectLst>
-            <a:outerShdw sx="100000" sy="100000" kx="0" ky="0" algn="bl" rotWithShape="0" blurRad="101600" dist="63500" dir="2700000">
-              <a:srgbClr val="000000">
-                <a:alpha val="100000"/>
-              </a:srgbClr>
-            </a:outerShdw>
-          </a:effectLst>
-        </p:spPr>
-      </p:sp>
-      <p:sp>
-        <p:nvSpPr>
-          <p:cNvPr id="21" name="Shape 19"/>
-          <p:cNvSpPr/>
-          <p:nvPr/>
-        </p:nvSpPr>
-        <p:spPr>
-          <a:xfrm>
-            <a:off x="6389688" y="3325813"/>
-            <a:ext cx="396875" cy="396875"/>
-          </a:xfrm>
-          <a:custGeom>
-            <a:avLst/>
-            <a:gdLst/>
-            <a:ahLst/>
-            <a:cxnLst/>
-            <a:rect l="l" t="t" r="r" b="b"/>
-            <a:pathLst>
-              <a:path w="396875" h="396875">
-                <a:moveTo>
-                  <a:pt x="0" y="0"/>
-                </a:moveTo>
-                <a:lnTo>
-                  <a:pt x="396875" y="0"/>
-                </a:lnTo>
-                <a:lnTo>
-                  <a:pt x="396875" y="396875"/>
-                </a:lnTo>
-                <a:lnTo>
-                  <a:pt x="0" y="396875"/>
-                </a:lnTo>
-                <a:lnTo>
-                  <a:pt x="0" y="0"/>
-                </a:lnTo>
-                <a:close/>
-              </a:path>
-            </a:pathLst>
-          </a:custGeom>
-          <a:solidFill>
-            <a:srgbClr val="000000"/>
-          </a:solidFill>
-          <a:ln w="76200">
-            <a:solidFill>
-              <a:srgbClr val="000000"/>
-            </a:solidFill>
-            <a:prstDash val="solid"/>
-          </a:ln>
-        </p:spPr>
-      </p:sp>
-      <p:sp>
-        <p:nvSpPr>
-          <p:cNvPr id="22" name="Text 20"/>
-          <p:cNvSpPr/>
-          <p:nvPr/>
-        </p:nvSpPr>
-        <p:spPr>
-          <a:xfrm>
-            <a:off x="6318250" y="3302000"/>
-            <a:ext cx="444500" cy="349250"/>
-          </a:xfrm>
-          <a:prstGeom prst="rect">
-            <a:avLst/>
-          </a:prstGeom>
-          <a:noFill/>
-          <a:ln/>
-        </p:spPr>
-        <p:txBody>
-          <a:bodyPr wrap="square" lIns="0" tIns="0" rIns="0" bIns="0" rtlCol="0" anchor="ctr"/>
-          <a:lstStyle/>
-          <a:p>
-            <a:pPr algn="ctr">
-              <a:lnSpc>
-                <a:spcPct val="110000"/>
-              </a:lnSpc>
-            </a:pPr>
-            <a:r>
-              <a:rPr lang="en-US" sz="1500" b="1" dirty="0">
-                <a:solidFill>
-                  <a:srgbClr val="FFFFFF"/>
-                </a:solidFill>
-                <a:latin typeface="Noto Sans SC" pitchFamily="34" charset="0"/>
-                <a:ea typeface="Noto Sans SC" pitchFamily="34" charset="-122"/>
-                <a:cs typeface="Noto Sans SC" pitchFamily="34" charset="-120"/>
-              </a:rPr>
-              <a:t>4</a:t>
-            </a:r>
-            <a:endParaRPr lang="en-US" sz="1600" dirty="0"/>
-          </a:p>
-        </p:txBody>
-      </p:sp>
-      <p:sp>
-        <p:nvSpPr>
-          <p:cNvPr id="23" name="Text 21"/>
-          <p:cNvSpPr/>
-          <p:nvPr/>
-        </p:nvSpPr>
-        <p:spPr>
-          <a:xfrm>
-            <a:off x="6937375" y="3302000"/>
-            <a:ext cx="4754563" cy="254000"/>
-          </a:xfrm>
-          <a:prstGeom prst="rect">
-            <a:avLst/>
-          </a:prstGeom>
-          <a:noFill/>
-          <a:ln/>
-        </p:spPr>
-        <p:txBody>
-          <a:bodyPr wrap="square" lIns="0" tIns="0" rIns="0" bIns="0" rtlCol="0" anchor="ctr"/>
-          <a:lstStyle/>
-          <a:p>
-            <a:pPr>
-              <a:lnSpc>
-                <a:spcPct val="110000"/>
-              </a:lnSpc>
-            </a:pPr>
-            <a:r>
-              <a:rPr lang="en-US" sz="1500" b="1" dirty="0">
-                <a:solidFill>
-                  <a:srgbClr val="000000"/>
-                </a:solidFill>
-                <a:latin typeface="Noto Sans SC" pitchFamily="34" charset="0"/>
-                <a:ea typeface="Noto Sans SC" pitchFamily="34" charset="-122"/>
-                <a:cs typeface="Noto Sans SC" pitchFamily="34" charset="-120"/>
-              </a:rPr>
-              <a:t>CHALLENGES REMAIN, BUT SOLUTIONS EMERGE</a:t>
-            </a:r>
-            <a:endParaRPr lang="en-US" sz="1600" dirty="0"/>
-          </a:p>
-        </p:txBody>
-      </p:sp>
-      <p:sp>
-        <p:nvSpPr>
-          <p:cNvPr id="24" name="Text 22"/>
-          <p:cNvSpPr/>
-          <p:nvPr/>
-        </p:nvSpPr>
-        <p:spPr>
-          <a:xfrm>
-            <a:off x="6365875" y="3841750"/>
-            <a:ext cx="5365750" cy="619125"/>
-          </a:xfrm>
-          <a:prstGeom prst="rect">
-            <a:avLst/>
-          </a:prstGeom>
-          <a:noFill/>
-          <a:ln/>
-        </p:spPr>
-        <p:txBody>
-          <a:bodyPr wrap="square" lIns="0" tIns="0" rIns="0" bIns="0" rtlCol="0" anchor="ctr"/>
-          <a:lstStyle/>
-          <a:p>
-            <a:pPr>
-              <a:lnSpc>
-                <a:spcPct val="140000"/>
-              </a:lnSpc>
-            </a:pPr>
-            <a:r>
-              <a:rPr lang="en-US" sz="1000" dirty="0">
-                <a:solidFill>
-                  <a:srgbClr val="000000"/>
-                </a:solidFill>
-                <a:latin typeface="MiSans" pitchFamily="34" charset="0"/>
-                <a:ea typeface="MiSans" pitchFamily="34" charset="-122"/>
-                <a:cs typeface="MiSans" pitchFamily="34" charset="-120"/>
-              </a:rPr>
-              <a:t>Scalability, energy consumption, and regulation are real challenges. However, </a:t>
-            </a:r>
-            <a:pPr>
-              <a:lnSpc>
-                <a:spcPct val="140000"/>
-              </a:lnSpc>
-            </a:pPr>
-            <a:r>
-              <a:rPr lang="en-US" sz="1000" b="1" dirty="0">
-                <a:solidFill>
-                  <a:srgbClr val="000000"/>
-                </a:solidFill>
-                <a:latin typeface="MiSans" pitchFamily="34" charset="0"/>
-                <a:ea typeface="MiSans" pitchFamily="34" charset="-122"/>
-                <a:cs typeface="MiSans" pitchFamily="34" charset="-120"/>
-              </a:rPr>
-              <a:t>Layer 2 solutions</a:t>
-            </a:r>
-            <a:pPr>
-              <a:lnSpc>
-                <a:spcPct val="140000"/>
-              </a:lnSpc>
-            </a:pPr>
-            <a:r>
-              <a:rPr lang="en-US" sz="1000" dirty="0">
-                <a:solidFill>
-                  <a:srgbClr val="000000"/>
-                </a:solidFill>
-                <a:latin typeface="MiSans" pitchFamily="34" charset="0"/>
-                <a:ea typeface="MiSans" pitchFamily="34" charset="-122"/>
-                <a:cs typeface="MiSans" pitchFamily="34" charset="-120"/>
-              </a:rPr>
-              <a:t> (Lightning Network), renewable energy adoption (~55% of mining), and regulatory clarity are addressing these issues.</a:t>
-            </a:r>
-            <a:endParaRPr lang="en-US" sz="1600" dirty="0"/>
-          </a:p>
-        </p:txBody>
-      </p:sp>
-      <p:sp>
-        <p:nvSpPr>
-          <p:cNvPr id="25" name="Shape 23"/>
-          <p:cNvSpPr/>
-          <p:nvPr/>
-        </p:nvSpPr>
-        <p:spPr>
-          <a:xfrm>
-            <a:off x="341313" y="4881563"/>
-            <a:ext cx="5667375" cy="1524000"/>
-          </a:xfrm>
-          <a:custGeom>
-            <a:avLst/>
-            <a:gdLst/>
-            <a:ahLst/>
-            <a:cxnLst/>
-            <a:rect l="l" t="t" r="r" b="b"/>
-            <a:pathLst>
-              <a:path w="5667375" h="1524000">
-                <a:moveTo>
-                  <a:pt x="0" y="0"/>
-                </a:moveTo>
-                <a:lnTo>
-                  <a:pt x="5667375" y="0"/>
-                </a:lnTo>
-                <a:lnTo>
-                  <a:pt x="5667375" y="1524000"/>
-                </a:lnTo>
-                <a:lnTo>
-                  <a:pt x="0" y="1524000"/>
-                </a:lnTo>
-                <a:lnTo>
-                  <a:pt x="0" y="0"/>
-                </a:lnTo>
-                <a:close/>
-              </a:path>
-            </a:pathLst>
-          </a:custGeom>
-          <a:solidFill>
-            <a:srgbClr val="FFFFFF"/>
-          </a:solidFill>
-          <a:ln w="76200">
-            <a:solidFill>
-              <a:srgbClr val="000000"/>
-            </a:solidFill>
-            <a:prstDash val="solid"/>
-          </a:ln>
-          <a:effectLst>
-            <a:outerShdw sx="100000" sy="100000" kx="0" ky="0" algn="bl" rotWithShape="0" blurRad="101600" dist="63500" dir="2700000">
-              <a:srgbClr val="000000">
-                <a:alpha val="100000"/>
-              </a:srgbClr>
-            </a:outerShdw>
-          </a:effectLst>
-        </p:spPr>
-      </p:sp>
-      <p:sp>
-        <p:nvSpPr>
-          <p:cNvPr id="26" name="Shape 24"/>
-          <p:cNvSpPr/>
-          <p:nvPr/>
-        </p:nvSpPr>
-        <p:spPr>
-          <a:xfrm>
-            <a:off x="547688" y="5087938"/>
-            <a:ext cx="396875" cy="396875"/>
-          </a:xfrm>
-          <a:custGeom>
-            <a:avLst/>
-            <a:gdLst/>
-            <a:ahLst/>
-            <a:cxnLst/>
-            <a:rect l="l" t="t" r="r" b="b"/>
-            <a:pathLst>
-              <a:path w="396875" h="396875">
-                <a:moveTo>
-                  <a:pt x="0" y="0"/>
-                </a:moveTo>
-                <a:lnTo>
-                  <a:pt x="396875" y="0"/>
-                </a:lnTo>
-                <a:lnTo>
-                  <a:pt x="396875" y="396875"/>
-                </a:lnTo>
-                <a:lnTo>
-                  <a:pt x="0" y="396875"/>
-                </a:lnTo>
-                <a:lnTo>
-                  <a:pt x="0" y="0"/>
-                </a:lnTo>
-                <a:close/>
-              </a:path>
-            </a:pathLst>
-          </a:custGeom>
-          <a:solidFill>
-            <a:srgbClr val="000000"/>
-          </a:solidFill>
-          <a:ln w="76200">
-            <a:solidFill>
-              <a:srgbClr val="000000"/>
-            </a:solidFill>
-            <a:prstDash val="solid"/>
-          </a:ln>
-        </p:spPr>
-      </p:sp>
-      <p:sp>
-        <p:nvSpPr>
-          <p:cNvPr id="27" name="Text 25"/>
-          <p:cNvSpPr/>
-          <p:nvPr/>
-        </p:nvSpPr>
-        <p:spPr>
-          <a:xfrm>
-            <a:off x="476250" y="5064125"/>
-            <a:ext cx="444500" cy="349250"/>
-          </a:xfrm>
-          <a:prstGeom prst="rect">
-            <a:avLst/>
-          </a:prstGeom>
-          <a:noFill/>
-          <a:ln/>
-        </p:spPr>
-        <p:txBody>
-          <a:bodyPr wrap="square" lIns="0" tIns="0" rIns="0" bIns="0" rtlCol="0" anchor="ctr"/>
-          <a:lstStyle/>
-          <a:p>
-            <a:pPr algn="ctr">
-              <a:lnSpc>
-                <a:spcPct val="110000"/>
-              </a:lnSpc>
-            </a:pPr>
-            <a:r>
-              <a:rPr lang="en-US" sz="1500" b="1" dirty="0">
-                <a:solidFill>
-                  <a:srgbClr val="FFFFFF"/>
-                </a:solidFill>
-                <a:latin typeface="Noto Sans SC" pitchFamily="34" charset="0"/>
-                <a:ea typeface="Noto Sans SC" pitchFamily="34" charset="-122"/>
-                <a:cs typeface="Noto Sans SC" pitchFamily="34" charset="-120"/>
-              </a:rPr>
-              <a:t>5</a:t>
-            </a:r>
-            <a:endParaRPr lang="en-US" sz="1600" dirty="0"/>
-          </a:p>
-        </p:txBody>
-      </p:sp>
-      <p:sp>
-        <p:nvSpPr>
-          <p:cNvPr id="28" name="Text 26"/>
-          <p:cNvSpPr/>
-          <p:nvPr/>
-        </p:nvSpPr>
-        <p:spPr>
-          <a:xfrm>
-            <a:off x="1095375" y="5064125"/>
-            <a:ext cx="3262313" cy="254000"/>
-          </a:xfrm>
-          <a:prstGeom prst="rect">
-            <a:avLst/>
-          </a:prstGeom>
-          <a:noFill/>
-          <a:ln/>
-        </p:spPr>
-        <p:txBody>
-          <a:bodyPr wrap="square" lIns="0" tIns="0" rIns="0" bIns="0" rtlCol="0" anchor="ctr"/>
-          <a:lstStyle/>
-          <a:p>
-            <a:pPr>
-              <a:lnSpc>
-                <a:spcPct val="110000"/>
-              </a:lnSpc>
-            </a:pPr>
-            <a:r>
-              <a:rPr lang="en-US" sz="1500" b="1" dirty="0">
-                <a:solidFill>
-                  <a:srgbClr val="000000"/>
-                </a:solidFill>
-                <a:latin typeface="Noto Sans SC" pitchFamily="34" charset="0"/>
-                <a:ea typeface="Noto Sans SC" pitchFamily="34" charset="-122"/>
-                <a:cs typeface="Noto Sans SC" pitchFamily="34" charset="-120"/>
-              </a:rPr>
-              <a:t>"DIGITAL GOLD" STILL EVOLVING</a:t>
-            </a:r>
-            <a:endParaRPr lang="en-US" sz="1600" dirty="0"/>
-          </a:p>
-        </p:txBody>
-      </p:sp>
-      <p:sp>
-        <p:nvSpPr>
-          <p:cNvPr id="29" name="Text 27"/>
-          <p:cNvSpPr/>
-          <p:nvPr/>
-        </p:nvSpPr>
-        <p:spPr>
-          <a:xfrm>
-            <a:off x="523875" y="5603875"/>
-            <a:ext cx="5365750" cy="619125"/>
-          </a:xfrm>
-          <a:prstGeom prst="rect">
-            <a:avLst/>
-          </a:prstGeom>
-          <a:noFill/>
-          <a:ln/>
-        </p:spPr>
-        <p:txBody>
-          <a:bodyPr wrap="square" lIns="0" tIns="0" rIns="0" bIns="0" rtlCol="0" anchor="ctr"/>
-          <a:lstStyle/>
-          <a:p>
-            <a:pPr>
-              <a:lnSpc>
-                <a:spcPct val="140000"/>
-              </a:lnSpc>
-            </a:pPr>
-            <a:r>
-              <a:rPr lang="en-US" sz="1000" dirty="0">
-                <a:solidFill>
-                  <a:srgbClr val="000000"/>
-                </a:solidFill>
-                <a:latin typeface="MiSans" pitchFamily="34" charset="0"/>
-                <a:ea typeface="MiSans" pitchFamily="34" charset="-122"/>
-                <a:cs typeface="MiSans" pitchFamily="34" charset="-120"/>
-              </a:rPr>
-              <a:t>Bitcoin's </a:t>
-            </a:r>
-            <a:pPr>
-              <a:lnSpc>
-                <a:spcPct val="140000"/>
-              </a:lnSpc>
-            </a:pPr>
-            <a:r>
-              <a:rPr lang="en-US" sz="1000" b="1" dirty="0">
-                <a:solidFill>
-                  <a:srgbClr val="000000"/>
-                </a:solidFill>
-                <a:latin typeface="MiSans" pitchFamily="34" charset="0"/>
-                <a:ea typeface="MiSans" pitchFamily="34" charset="-122"/>
-                <a:cs typeface="MiSans" pitchFamily="34" charset="-120"/>
-              </a:rPr>
-              <a:t>scarcity and decentralization</a:t>
-            </a:r>
-            <a:pPr>
-              <a:lnSpc>
-                <a:spcPct val="140000"/>
-              </a:lnSpc>
-            </a:pPr>
-            <a:r>
-              <a:rPr lang="en-US" sz="1000" dirty="0">
-                <a:solidFill>
-                  <a:srgbClr val="000000"/>
-                </a:solidFill>
-                <a:latin typeface="MiSans" pitchFamily="34" charset="0"/>
-                <a:ea typeface="MiSans" pitchFamily="34" charset="-122"/>
-                <a:cs typeface="MiSans" pitchFamily="34" charset="-120"/>
-              </a:rPr>
-              <a:t> provide unique value, but it hasn't consistently acted as a crisis hedge like gold. As the asset matures and volatility decreases, the digital gold thesis may be validated—or Bitcoin may carve out a different role.</a:t>
-            </a:r>
-            <a:endParaRPr lang="en-US" sz="1600" dirty="0"/>
-          </a:p>
-        </p:txBody>
-      </p:sp>
-      <p:sp>
-        <p:nvSpPr>
-          <p:cNvPr id="30" name="Shape 28"/>
-          <p:cNvSpPr/>
-          <p:nvPr/>
-        </p:nvSpPr>
-        <p:spPr>
-          <a:xfrm>
-            <a:off x="6183313" y="4881563"/>
-            <a:ext cx="5667375" cy="1524000"/>
-          </a:xfrm>
-          <a:custGeom>
-            <a:avLst/>
-            <a:gdLst/>
-            <a:ahLst/>
-            <a:cxnLst/>
-            <a:rect l="l" t="t" r="r" b="b"/>
-            <a:pathLst>
-              <a:path w="5667375" h="1524000">
-                <a:moveTo>
-                  <a:pt x="0" y="0"/>
-                </a:moveTo>
-                <a:lnTo>
-                  <a:pt x="5667375" y="0"/>
-                </a:lnTo>
-                <a:lnTo>
-                  <a:pt x="5667375" y="1524000"/>
-                </a:lnTo>
-                <a:lnTo>
-                  <a:pt x="0" y="1524000"/>
-                </a:lnTo>
-                <a:lnTo>
-                  <a:pt x="0" y="0"/>
-                </a:lnTo>
-                <a:close/>
-              </a:path>
-            </a:pathLst>
-          </a:custGeom>
-          <a:solidFill>
-            <a:srgbClr val="FFFFFF"/>
-          </a:solidFill>
-          <a:ln w="76200">
-            <a:solidFill>
-              <a:srgbClr val="000000"/>
-            </a:solidFill>
-            <a:prstDash val="solid"/>
-          </a:ln>
-          <a:effectLst>
-            <a:outerShdw sx="100000" sy="100000" kx="0" ky="0" algn="bl" rotWithShape="0" blurRad="101600" dist="63500" dir="2700000">
-              <a:srgbClr val="000000">
-                <a:alpha val="100000"/>
-              </a:srgbClr>
-            </a:outerShdw>
-          </a:effectLst>
-        </p:spPr>
-      </p:sp>
-      <p:sp>
-        <p:nvSpPr>
-          <p:cNvPr id="31" name="Shape 29"/>
-          <p:cNvSpPr/>
-          <p:nvPr/>
-        </p:nvSpPr>
-        <p:spPr>
-          <a:xfrm>
-            <a:off x="6389688" y="5087938"/>
-            <a:ext cx="396875" cy="396875"/>
-          </a:xfrm>
-          <a:custGeom>
-            <a:avLst/>
-            <a:gdLst/>
-            <a:ahLst/>
-            <a:cxnLst/>
-            <a:rect l="l" t="t" r="r" b="b"/>
-            <a:pathLst>
-              <a:path w="396875" h="396875">
-                <a:moveTo>
-                  <a:pt x="0" y="0"/>
-                </a:moveTo>
-                <a:lnTo>
-                  <a:pt x="396875" y="0"/>
-                </a:lnTo>
-                <a:lnTo>
-                  <a:pt x="396875" y="396875"/>
-                </a:lnTo>
-                <a:lnTo>
-                  <a:pt x="0" y="396875"/>
-                </a:lnTo>
-                <a:lnTo>
-                  <a:pt x="0" y="0"/>
-                </a:lnTo>
-                <a:close/>
-              </a:path>
-            </a:pathLst>
-          </a:custGeom>
-          <a:solidFill>
-            <a:srgbClr val="000000"/>
-          </a:solidFill>
-          <a:ln w="76200">
-            <a:solidFill>
-              <a:srgbClr val="000000"/>
-            </a:solidFill>
-            <a:prstDash val="solid"/>
-          </a:ln>
-        </p:spPr>
-      </p:sp>
-      <p:sp>
-        <p:nvSpPr>
-          <p:cNvPr id="32" name="Text 30"/>
-          <p:cNvSpPr/>
-          <p:nvPr/>
-        </p:nvSpPr>
-        <p:spPr>
-          <a:xfrm>
-            <a:off x="6318250" y="5064125"/>
-            <a:ext cx="444500" cy="349250"/>
-          </a:xfrm>
-          <a:prstGeom prst="rect">
-            <a:avLst/>
-          </a:prstGeom>
-          <a:noFill/>
-          <a:ln/>
-        </p:spPr>
-        <p:txBody>
-          <a:bodyPr wrap="square" lIns="0" tIns="0" rIns="0" bIns="0" rtlCol="0" anchor="ctr"/>
-          <a:lstStyle/>
-          <a:p>
-            <a:pPr algn="ctr">
-              <a:lnSpc>
-                <a:spcPct val="110000"/>
-              </a:lnSpc>
-            </a:pPr>
-            <a:r>
-              <a:rPr lang="en-US" sz="1500" b="1" dirty="0">
-                <a:solidFill>
-                  <a:srgbClr val="FFFFFF"/>
-                </a:solidFill>
-                <a:latin typeface="Noto Sans SC" pitchFamily="34" charset="0"/>
-                <a:ea typeface="Noto Sans SC" pitchFamily="34" charset="-122"/>
-                <a:cs typeface="Noto Sans SC" pitchFamily="34" charset="-120"/>
-              </a:rPr>
-              <a:t>6</a:t>
-            </a:r>
-            <a:endParaRPr lang="en-US" sz="1600" dirty="0"/>
-          </a:p>
-        </p:txBody>
-      </p:sp>
-      <p:sp>
-        <p:nvSpPr>
-          <p:cNvPr id="33" name="Text 31"/>
-          <p:cNvSpPr/>
-          <p:nvPr/>
-        </p:nvSpPr>
-        <p:spPr>
-          <a:xfrm>
-            <a:off x="6937375" y="5064125"/>
-            <a:ext cx="3302000" cy="254000"/>
-          </a:xfrm>
-          <a:prstGeom prst="rect">
-            <a:avLst/>
-          </a:prstGeom>
-          <a:noFill/>
-          <a:ln/>
-        </p:spPr>
-        <p:txBody>
-          <a:bodyPr wrap="square" lIns="0" tIns="0" rIns="0" bIns="0" rtlCol="0" anchor="ctr"/>
-          <a:lstStyle/>
-          <a:p>
-            <a:pPr>
-              <a:lnSpc>
-                <a:spcPct val="110000"/>
-              </a:lnSpc>
-            </a:pPr>
-            <a:r>
-              <a:rPr lang="en-US" sz="1500" b="1" dirty="0">
-                <a:solidFill>
-                  <a:srgbClr val="000000"/>
-                </a:solidFill>
-                <a:latin typeface="Noto Sans SC" pitchFamily="34" charset="0"/>
-                <a:ea typeface="Noto Sans SC" pitchFamily="34" charset="-122"/>
-                <a:cs typeface="Noto Sans SC" pitchFamily="34" charset="-120"/>
-              </a:rPr>
-              <a:t>2024-2030: THE CRITICAL DECADE</a:t>
-            </a:r>
-            <a:endParaRPr lang="en-US" sz="1600" dirty="0"/>
-          </a:p>
-        </p:txBody>
-      </p:sp>
-      <p:sp>
-        <p:nvSpPr>
-          <p:cNvPr id="34" name="Text 32"/>
-          <p:cNvSpPr/>
-          <p:nvPr/>
-        </p:nvSpPr>
-        <p:spPr>
-          <a:xfrm>
-            <a:off x="6365875" y="5603875"/>
-            <a:ext cx="5365750" cy="619125"/>
-          </a:xfrm>
-          <a:prstGeom prst="rect">
-            <a:avLst/>
-          </a:prstGeom>
-          <a:noFill/>
-          <a:ln/>
-        </p:spPr>
-        <p:txBody>
-          <a:bodyPr wrap="square" lIns="0" tIns="0" rIns="0" bIns="0" rtlCol="0" anchor="ctr"/>
-          <a:lstStyle/>
-          <a:p>
-            <a:pPr>
-              <a:lnSpc>
-                <a:spcPct val="140000"/>
-              </a:lnSpc>
-            </a:pPr>
-            <a:r>
-              <a:rPr lang="en-US" sz="1000" dirty="0">
-                <a:solidFill>
-                  <a:srgbClr val="000000"/>
-                </a:solidFill>
-                <a:latin typeface="MiSans" pitchFamily="34" charset="0"/>
-                <a:ea typeface="MiSans" pitchFamily="34" charset="-122"/>
-                <a:cs typeface="MiSans" pitchFamily="34" charset="-120"/>
-              </a:rPr>
-              <a:t>The next 6 years will determine Bitcoin's long-term trajectory. </a:t>
-            </a:r>
-            <a:pPr>
-              <a:lnSpc>
-                <a:spcPct val="140000"/>
-              </a:lnSpc>
-            </a:pPr>
-            <a:r>
-              <a:rPr lang="en-US" sz="1000" b="1" dirty="0">
-                <a:solidFill>
-                  <a:srgbClr val="000000"/>
-                </a:solidFill>
-                <a:latin typeface="MiSans" pitchFamily="34" charset="0"/>
-                <a:ea typeface="MiSans" pitchFamily="34" charset="-122"/>
-                <a:cs typeface="MiSans" pitchFamily="34" charset="-120"/>
-              </a:rPr>
-              <a:t>ETF adoption, corporate treasuries, nation-state accumulation, and the 2028 halving</a:t>
-            </a:r>
-            <a:pPr>
-              <a:lnSpc>
-                <a:spcPct val="140000"/>
-              </a:lnSpc>
-            </a:pPr>
-            <a:r>
-              <a:rPr lang="en-US" sz="1000" dirty="0">
-                <a:solidFill>
-                  <a:srgbClr val="000000"/>
-                </a:solidFill>
-                <a:latin typeface="MiSans" pitchFamily="34" charset="0"/>
-                <a:ea typeface="MiSans" pitchFamily="34" charset="-122"/>
-                <a:cs typeface="MiSans" pitchFamily="34" charset="-120"/>
-              </a:rPr>
-              <a:t> could propel Bitcoin to $150K-$500K+ or higher. The foundation is being laid for mainstream integration.</a:t>
-            </a:r>
-            <a:endParaRPr lang="en-US" sz="1600" dirty="0"/>
-          </a:p>
-        </p:txBody>
-      </p:sp>
-      <p:sp>
-        <p:nvSpPr>
-          <p:cNvPr id="35" name="Shape 33"/>
-          <p:cNvSpPr/>
-          <p:nvPr/>
-        </p:nvSpPr>
-        <p:spPr>
-          <a:xfrm>
-            <a:off x="341313" y="6580188"/>
-            <a:ext cx="11509375" cy="1666875"/>
-          </a:xfrm>
-          <a:custGeom>
-            <a:avLst/>
-            <a:gdLst/>
-            <a:ahLst/>
-            <a:cxnLst/>
-            <a:rect l="l" t="t" r="r" b="b"/>
-            <a:pathLst>
-              <a:path w="11509375" h="1666875">
-                <a:moveTo>
-                  <a:pt x="0" y="0"/>
-                </a:moveTo>
-                <a:lnTo>
-                  <a:pt x="11509375" y="0"/>
-                </a:lnTo>
-                <a:lnTo>
-                  <a:pt x="11509375" y="1666875"/>
-                </a:lnTo>
-                <a:lnTo>
-                  <a:pt x="0" y="1666875"/>
-                </a:lnTo>
-                <a:lnTo>
-                  <a:pt x="0" y="0"/>
-                </a:lnTo>
-                <a:close/>
-              </a:path>
-            </a:pathLst>
-          </a:custGeom>
-          <a:solidFill>
-            <a:srgbClr val="000000"/>
-          </a:solidFill>
-          <a:ln w="76200">
-            <a:solidFill>
-              <a:srgbClr val="000000"/>
-            </a:solidFill>
-            <a:prstDash val="solid"/>
-          </a:ln>
-        </p:spPr>
-      </p:sp>
-      <p:sp>
-        <p:nvSpPr>
-          <p:cNvPr id="36" name="Text 34"/>
-          <p:cNvSpPr/>
-          <p:nvPr/>
-        </p:nvSpPr>
-        <p:spPr>
-          <a:xfrm>
-            <a:off x="523875" y="7032625"/>
-            <a:ext cx="10017125" cy="254000"/>
-          </a:xfrm>
-          <a:prstGeom prst="rect">
-            <a:avLst/>
-          </a:prstGeom>
-          <a:noFill/>
-          <a:ln/>
-        </p:spPr>
-        <p:txBody>
-          <a:bodyPr wrap="square" lIns="0" tIns="0" rIns="0" bIns="0" rtlCol="0" anchor="ctr"/>
-          <a:lstStyle/>
-          <a:p>
-            <a:pPr>
-              <a:lnSpc>
-                <a:spcPct val="110000"/>
-              </a:lnSpc>
-            </a:pPr>
-            <a:r>
-              <a:rPr lang="en-US" sz="1500" b="1" dirty="0">
-                <a:solidFill>
-                  <a:srgbClr val="FFFFFF"/>
-                </a:solidFill>
-                <a:latin typeface="Noto Sans SC" pitchFamily="34" charset="0"/>
-                <a:ea typeface="Noto Sans SC" pitchFamily="34" charset="-122"/>
-                <a:cs typeface="Noto Sans SC" pitchFamily="34" charset="-120"/>
-              </a:rPr>
-              <a:t>THE BOTTOM LINE</a:t>
-            </a:r>
-            <a:endParaRPr lang="en-US" sz="1600" dirty="0"/>
-          </a:p>
-        </p:txBody>
-      </p:sp>
-      <p:sp>
-        <p:nvSpPr>
-          <p:cNvPr id="37" name="Text 35"/>
-          <p:cNvSpPr/>
-          <p:nvPr/>
-        </p:nvSpPr>
-        <p:spPr>
-          <a:xfrm>
-            <a:off x="523875" y="7350125"/>
-            <a:ext cx="9993313" cy="444500"/>
-          </a:xfrm>
-          <a:prstGeom prst="rect">
-            <a:avLst/>
-          </a:prstGeom>
-          <a:noFill/>
-          <a:ln/>
-        </p:spPr>
-        <p:txBody>
-          <a:bodyPr wrap="square" lIns="0" tIns="0" rIns="0" bIns="0" rtlCol="0" anchor="ctr"/>
-          <a:lstStyle/>
-          <a:p>
-            <a:pPr>
-              <a:lnSpc>
-                <a:spcPct val="130000"/>
-              </a:lnSpc>
-            </a:pPr>
-            <a:r>
-              <a:rPr lang="en-US" sz="1125" dirty="0">
-                <a:solidFill>
-                  <a:srgbClr val="FFFFFF"/>
-                </a:solidFill>
-                <a:latin typeface="MiSans" pitchFamily="34" charset="0"/>
-                <a:ea typeface="MiSans" pitchFamily="34" charset="-122"/>
-                <a:cs typeface="MiSans" pitchFamily="34" charset="-120"/>
-              </a:rPr>
-              <a:t>Bitcoin represents both </a:t>
-            </a:r>
-            <a:pPr>
-              <a:lnSpc>
-                <a:spcPct val="130000"/>
-              </a:lnSpc>
-            </a:pPr>
-            <a:r>
-              <a:rPr lang="en-US" sz="1125" b="1" dirty="0">
-                <a:solidFill>
-                  <a:srgbClr val="FFFFFF"/>
-                </a:solidFill>
-                <a:latin typeface="MiSans" pitchFamily="34" charset="0"/>
-                <a:ea typeface="MiSans" pitchFamily="34" charset="-122"/>
-                <a:cs typeface="MiSans" pitchFamily="34" charset="-120"/>
-              </a:rPr>
-              <a:t>transformative potential</a:t>
-            </a:r>
-            <a:pPr>
-              <a:lnSpc>
-                <a:spcPct val="130000"/>
-              </a:lnSpc>
-            </a:pPr>
-            <a:r>
-              <a:rPr lang="en-US" sz="1125" dirty="0">
-                <a:solidFill>
-                  <a:srgbClr val="FFFFFF"/>
-                </a:solidFill>
-                <a:latin typeface="MiSans" pitchFamily="34" charset="0"/>
-                <a:ea typeface="MiSans" pitchFamily="34" charset="-122"/>
-                <a:cs typeface="MiSans" pitchFamily="34" charset="-120"/>
-              </a:rPr>
-              <a:t> (decentralized, scarce, borderless money) and </a:t>
-            </a:r>
-            <a:pPr>
-              <a:lnSpc>
-                <a:spcPct val="130000"/>
-              </a:lnSpc>
-            </a:pPr>
-            <a:r>
-              <a:rPr lang="en-US" sz="1125" b="1" dirty="0">
-                <a:solidFill>
-                  <a:srgbClr val="FFFFFF"/>
-                </a:solidFill>
-                <a:latin typeface="MiSans" pitchFamily="34" charset="0"/>
-                <a:ea typeface="MiSans" pitchFamily="34" charset="-122"/>
-                <a:cs typeface="MiSans" pitchFamily="34" charset="-120"/>
-              </a:rPr>
-              <a:t>significant risks</a:t>
-            </a:r>
-            <a:pPr>
-              <a:lnSpc>
-                <a:spcPct val="130000"/>
-              </a:lnSpc>
-            </a:pPr>
-            <a:r>
-              <a:rPr lang="en-US" sz="1125" dirty="0">
-                <a:solidFill>
-                  <a:srgbClr val="FFFFFF"/>
-                </a:solidFill>
-                <a:latin typeface="MiSans" pitchFamily="34" charset="0"/>
-                <a:ea typeface="MiSans" pitchFamily="34" charset="-122"/>
-                <a:cs typeface="MiSans" pitchFamily="34" charset="-120"/>
-              </a:rPr>
-              <a:t> (volatility, regulation, competition). Approach with understanding of both.</a:t>
-            </a:r>
-            <a:endParaRPr lang="en-US" sz="1600" dirty="0"/>
-          </a:p>
-        </p:txBody>
-      </p:sp>
-      <p:sp>
-        <p:nvSpPr>
-          <p:cNvPr id="38" name="Shape 36"/>
-          <p:cNvSpPr/>
-          <p:nvPr/>
-        </p:nvSpPr>
-        <p:spPr>
-          <a:xfrm>
-            <a:off x="10662667" y="6786563"/>
-            <a:ext cx="984250" cy="1254125"/>
-          </a:xfrm>
-          <a:custGeom>
-            <a:avLst/>
-            <a:gdLst/>
-            <a:ahLst/>
-            <a:cxnLst/>
-            <a:rect l="l" t="t" r="r" b="b"/>
-            <a:pathLst>
-              <a:path w="984250" h="1254125">
-                <a:moveTo>
-                  <a:pt x="0" y="0"/>
-                </a:moveTo>
-                <a:lnTo>
-                  <a:pt x="984250" y="0"/>
-                </a:lnTo>
-                <a:lnTo>
-                  <a:pt x="984250" y="1254125"/>
-                </a:lnTo>
-                <a:lnTo>
-                  <a:pt x="0" y="1254125"/>
-                </a:lnTo>
-                <a:lnTo>
-                  <a:pt x="0" y="0"/>
-                </a:lnTo>
-                <a:close/>
-              </a:path>
-            </a:pathLst>
-          </a:custGeom>
-          <a:solidFill>
-            <a:srgbClr val="FFFFFF"/>
-          </a:solidFill>
-          <a:ln w="76200">
-            <a:solidFill>
-              <a:srgbClr val="000000"/>
-            </a:solidFill>
-            <a:prstDash val="solid"/>
-          </a:ln>
-        </p:spPr>
-      </p:sp>
-      <p:sp>
-        <p:nvSpPr>
-          <p:cNvPr id="39" name="Text 37"/>
-          <p:cNvSpPr/>
-          <p:nvPr/>
-        </p:nvSpPr>
-        <p:spPr>
-          <a:xfrm>
-            <a:off x="10781729" y="6937375"/>
-            <a:ext cx="746125" cy="952500"/>
-          </a:xfrm>
-          <a:prstGeom prst="rect">
-            <a:avLst/>
-          </a:prstGeom>
-          <a:noFill/>
-          <a:ln/>
-        </p:spPr>
-        <p:txBody>
-          <a:bodyPr wrap="square" lIns="0" tIns="0" rIns="0" bIns="0" rtlCol="0" anchor="ctr"/>
-          <a:lstStyle/>
-          <a:p>
-            <a:pPr algn="ctr">
-              <a:lnSpc>
-                <a:spcPct val="130000"/>
-              </a:lnSpc>
-            </a:pPr>
-            <a:r>
-              <a:rPr lang="en-US" sz="1000" b="1" dirty="0">
-                <a:solidFill>
-                  <a:srgbClr val="000000"/>
-                </a:solidFill>
-                <a:latin typeface="MiSans" pitchFamily="34" charset="0"/>
-                <a:ea typeface="MiSans" pitchFamily="34" charset="-122"/>
-                <a:cs typeface="MiSans" pitchFamily="34" charset="-120"/>
-              </a:rPr>
-              <a:t>2026-2030</a:t>
-            </a:r>
-            <a:endParaRPr lang="en-US" sz="1600" dirty="0"/>
-          </a:p>
-          <a:p>
-            <a:pPr algn="ctr">
-              <a:lnSpc>
-                <a:spcPct val="130000"/>
-              </a:lnSpc>
-            </a:pPr>
-            <a:r>
-              <a:rPr lang="en-US" sz="1000" b="1" dirty="0">
-                <a:solidFill>
-                  <a:srgbClr val="000000"/>
-                </a:solidFill>
-                <a:latin typeface="MiSans" pitchFamily="34" charset="0"/>
-                <a:ea typeface="MiSans" pitchFamily="34" charset="-122"/>
-                <a:cs typeface="MiSans" pitchFamily="34" charset="-120"/>
-              </a:rPr>
-              <a:t>WILL DEFINE</a:t>
-            </a:r>
-            <a:endParaRPr lang="en-US" sz="1600" dirty="0"/>
-          </a:p>
-          <a:p>
-            <a:pPr algn="ctr">
-              <a:lnSpc>
-                <a:spcPct val="130000"/>
-              </a:lnSpc>
-            </a:pPr>
-            <a:r>
-              <a:rPr lang="en-US" sz="1000" b="1" dirty="0">
-                <a:solidFill>
-                  <a:srgbClr val="000000"/>
-                </a:solidFill>
-                <a:latin typeface="MiSans" pitchFamily="34" charset="0"/>
-                <a:ea typeface="MiSans" pitchFamily="34" charset="-122"/>
-                <a:cs typeface="MiSans" pitchFamily="34" charset="-120"/>
-              </a:rPr>
-              <a:t>THE FUTURE</a:t>
-            </a:r>
-            <a:endParaRPr lang="en-US" sz="1600" dirty="0"/>
-          </a:p>
-        </p:txBody>
-      </p:sp>
-    </p:spTree>
-  </p:cSld>
-  <p:clrMapOvr>
-    <a:masterClrMapping/>
-  </p:clrMapOvr>
-</p:sld>
-</file>
-
-<file path=ppt/slides/slide27.xml><?xml version="1.0" encoding="utf-8"?>
-<p:sld xmlns:a="http://schemas.openxmlformats.org/drawingml/2006/main" xmlns:r="http://schemas.openxmlformats.org/officeDocument/2006/relationships" xmlns:p="http://schemas.openxmlformats.org/presentationml/2006/main">
-  <p:cSld name="Slide 27">
-    <p:bg>
-      <p:bgPr>
-        <a:solidFill>
-          <a:srgbClr val="FFFFFF"/>
-        </a:solidFill>
-      </p:bgPr>
-    </p:bg>
-    <p:spTree>
-      <p:nvGrpSpPr>
-        <p:cNvPr id="1" name=""/>
-        <p:cNvGrpSpPr/>
-        <p:nvPr/>
-      </p:nvGrpSpPr>
-      <p:grpSpPr>
-        <a:xfrm>
-          <a:off x="0" y="0"/>
-          <a:ext cx="0" cy="0"/>
-          <a:chOff x="0" y="0"/>
-          <a:chExt cx="0" cy="0"/>
-        </a:xfrm>
-      </p:grpSpPr>
-      <p:pic>
-        <p:nvPicPr>
-          <p:cNvPr id="2" name="Image 0" descr="https://kimi-web-img.moonshot.cn/img/cdn.vectorstock.com/dedad187e3b8b75d7280f5258cc0995ef815e5ed.jpg">    </p:cNvPr>
-          <p:cNvPicPr>
-            <a:picLocks noChangeAspect="1"/>
-          </p:cNvPicPr>
-          <p:nvPr/>
-        </p:nvPicPr>
-        <p:blipFill>
-          <a:blip r:embed="rId1">
-            <a:alphaModFix amt="10000"/>
-          </a:blip>
-          <a:srcRect l="0" r="0" t="23958" b="23958"/>
-          <a:stretch/>
-        </p:blipFill>
-        <p:spPr>
-          <a:xfrm>
-            <a:off x="0" y="0"/>
-            <a:ext cx="12192000" cy="6858000"/>
-          </a:xfrm>
-          <a:prstGeom prst="roundRect">
-            <a:avLst>
-              <a:gd name="adj" fmla="val 0"/>
-            </a:avLst>
-          </a:prstGeom>
-        </p:spPr>
-      </p:pic>
-      <p:sp>
-        <p:nvSpPr>
-          <p:cNvPr id="3" name="Shape 0"/>
-          <p:cNvSpPr/>
-          <p:nvPr/>
-        </p:nvSpPr>
-        <p:spPr>
-          <a:xfrm>
-            <a:off x="0" y="0"/>
-            <a:ext cx="12192000" cy="6858000"/>
-          </a:xfrm>
-          <a:custGeom>
-            <a:avLst/>
-            <a:gdLst/>
-            <a:ahLst/>
-            <a:cxnLst/>
-            <a:rect l="l" t="t" r="r" b="b"/>
-            <a:pathLst>
-              <a:path w="12192000" h="6858000">
-                <a:moveTo>
-                  <a:pt x="0" y="0"/>
-                </a:moveTo>
-                <a:lnTo>
-                  <a:pt x="12192000" y="0"/>
-                </a:lnTo>
-                <a:lnTo>
-                  <a:pt x="12192000" y="6858000"/>
-                </a:lnTo>
-                <a:lnTo>
-                  <a:pt x="0" y="6858000"/>
-                </a:lnTo>
-                <a:lnTo>
-                  <a:pt x="0" y="0"/>
-                </a:lnTo>
-                <a:close/>
-              </a:path>
-            </a:pathLst>
-          </a:custGeom>
-          <a:solidFill>
-            <a:srgbClr val="FFFFFF">
-              <a:alpha val="90000"/>
-            </a:srgbClr>
-          </a:solidFill>
-          <a:ln/>
-        </p:spPr>
-      </p:sp>
-      <p:sp>
-        <p:nvSpPr>
-          <p:cNvPr id="4" name="Shape 1"/>
-          <p:cNvSpPr/>
-          <p:nvPr/>
-        </p:nvSpPr>
-        <p:spPr>
-          <a:xfrm>
-            <a:off x="3356000" y="676275"/>
-            <a:ext cx="5476875" cy="4362450"/>
-          </a:xfrm>
-          <a:custGeom>
-            <a:avLst/>
-            <a:gdLst/>
-            <a:ahLst/>
-            <a:cxnLst/>
-            <a:rect l="l" t="t" r="r" b="b"/>
-            <a:pathLst>
-              <a:path w="5476875" h="4362450">
-                <a:moveTo>
-                  <a:pt x="0" y="0"/>
-                </a:moveTo>
-                <a:lnTo>
-                  <a:pt x="5476875" y="0"/>
-                </a:lnTo>
-                <a:lnTo>
-                  <a:pt x="5476875" y="4362450"/>
-                </a:lnTo>
-                <a:lnTo>
-                  <a:pt x="0" y="4362450"/>
-                </a:lnTo>
-                <a:lnTo>
-                  <a:pt x="0" y="0"/>
-                </a:lnTo>
-                <a:close/>
-              </a:path>
-            </a:pathLst>
-          </a:custGeom>
-          <a:solidFill>
-            <a:srgbClr val="FFFFFF"/>
-          </a:solidFill>
-          <a:ln w="76200">
-            <a:solidFill>
-              <a:srgbClr val="000000"/>
-            </a:solidFill>
-            <a:prstDash val="solid"/>
-          </a:ln>
-          <a:effectLst>
-            <a:outerShdw sx="100000" sy="100000" kx="0" ky="0" algn="bl" rotWithShape="0" blurRad="101600" dist="76200" dir="2700000">
-              <a:srgbClr val="000000">
-                <a:alpha val="100000"/>
-              </a:srgbClr>
-            </a:outerShdw>
-          </a:effectLst>
-        </p:spPr>
-      </p:sp>
-      <p:sp>
-        <p:nvSpPr>
-          <p:cNvPr id="5" name="Text 2"/>
-          <p:cNvSpPr/>
-          <p:nvPr/>
-        </p:nvSpPr>
-        <p:spPr>
-          <a:xfrm>
-            <a:off x="3670325" y="1162050"/>
-            <a:ext cx="4848225" cy="685800"/>
-          </a:xfrm>
-          <a:prstGeom prst="rect">
-            <a:avLst/>
-          </a:prstGeom>
-          <a:noFill/>
-          <a:ln/>
-        </p:spPr>
-        <p:txBody>
-          <a:bodyPr wrap="square" lIns="0" tIns="0" rIns="0" bIns="0" rtlCol="0" anchor="ctr"/>
-          <a:lstStyle/>
-          <a:p>
-            <a:pPr algn="ctr">
-              <a:lnSpc>
-                <a:spcPct val="80000"/>
-              </a:lnSpc>
-            </a:pPr>
-            <a:r>
-              <a:rPr lang="en-US" sz="5400" b="1" dirty="0">
-                <a:solidFill>
-                  <a:srgbClr val="000000"/>
-                </a:solidFill>
-                <a:latin typeface="Noto Sans SC" pitchFamily="34" charset="0"/>
-                <a:ea typeface="Noto Sans SC" pitchFamily="34" charset="-122"/>
-                <a:cs typeface="Noto Sans SC" pitchFamily="34" charset="-120"/>
-              </a:rPr>
-              <a:t>THANK YOU</a:t>
-            </a:r>
-            <a:endParaRPr lang="en-US" sz="1600" dirty="0"/>
-          </a:p>
-        </p:txBody>
-      </p:sp>
-      <p:sp>
-        <p:nvSpPr>
-          <p:cNvPr id="6" name="Shape 3"/>
-          <p:cNvSpPr/>
-          <p:nvPr/>
-        </p:nvSpPr>
-        <p:spPr>
-          <a:xfrm>
-            <a:off x="5181526" y="2076450"/>
-            <a:ext cx="1828800" cy="76200"/>
-          </a:xfrm>
-          <a:custGeom>
-            <a:avLst/>
-            <a:gdLst/>
-            <a:ahLst/>
-            <a:cxnLst/>
-            <a:rect l="l" t="t" r="r" b="b"/>
-            <a:pathLst>
-              <a:path w="1828800" h="76200">
-                <a:moveTo>
-                  <a:pt x="0" y="0"/>
-                </a:moveTo>
-                <a:lnTo>
-                  <a:pt x="1828800" y="0"/>
-                </a:lnTo>
-                <a:lnTo>
-                  <a:pt x="1828800" y="76200"/>
-                </a:lnTo>
-                <a:lnTo>
-                  <a:pt x="0" y="76200"/>
-                </a:lnTo>
-                <a:lnTo>
-                  <a:pt x="0" y="0"/>
-                </a:lnTo>
-                <a:close/>
-              </a:path>
-            </a:pathLst>
-          </a:custGeom>
-          <a:solidFill>
-            <a:srgbClr val="000000"/>
-          </a:solidFill>
-          <a:ln/>
-        </p:spPr>
-      </p:sp>
-      <p:sp>
-        <p:nvSpPr>
-          <p:cNvPr id="7" name="Text 4"/>
-          <p:cNvSpPr/>
-          <p:nvPr/>
-        </p:nvSpPr>
-        <p:spPr>
-          <a:xfrm>
-            <a:off x="3756050" y="2381250"/>
-            <a:ext cx="4676775" cy="381000"/>
-          </a:xfrm>
-          <a:prstGeom prst="rect">
-            <a:avLst/>
-          </a:prstGeom>
-          <a:noFill/>
-          <a:ln/>
-        </p:spPr>
-        <p:txBody>
-          <a:bodyPr wrap="square" lIns="0" tIns="0" rIns="0" bIns="0" rtlCol="0" anchor="ctr"/>
-          <a:lstStyle/>
-          <a:p>
-            <a:pPr algn="ctr">
-              <a:lnSpc>
-                <a:spcPct val="90000"/>
-              </a:lnSpc>
-            </a:pPr>
-            <a:r>
-              <a:rPr lang="en-US" sz="2700" b="1" dirty="0">
-                <a:solidFill>
-                  <a:srgbClr val="000000"/>
-                </a:solidFill>
-                <a:latin typeface="Noto Sans SC" pitchFamily="34" charset="0"/>
-                <a:ea typeface="Noto Sans SC" pitchFamily="34" charset="-122"/>
-                <a:cs typeface="Noto Sans SC" pitchFamily="34" charset="-120"/>
-              </a:rPr>
-              <a:t>Questions &amp; Discussion</a:t>
-            </a:r>
-            <a:endParaRPr lang="en-US" sz="1600" dirty="0"/>
-          </a:p>
-        </p:txBody>
-      </p:sp>
-      <p:sp>
-        <p:nvSpPr>
-          <p:cNvPr id="8" name="Shape 5"/>
-          <p:cNvSpPr/>
-          <p:nvPr/>
-        </p:nvSpPr>
-        <p:spPr>
-          <a:xfrm>
-            <a:off x="3870350" y="3095625"/>
-            <a:ext cx="4448175" cy="1428750"/>
-          </a:xfrm>
-          <a:custGeom>
-            <a:avLst/>
-            <a:gdLst/>
-            <a:ahLst/>
-            <a:cxnLst/>
-            <a:rect l="l" t="t" r="r" b="b"/>
-            <a:pathLst>
-              <a:path w="4448175" h="1428750">
-                <a:moveTo>
-                  <a:pt x="0" y="0"/>
-                </a:moveTo>
-                <a:lnTo>
-                  <a:pt x="4448175" y="0"/>
-                </a:lnTo>
-                <a:lnTo>
-                  <a:pt x="4448175" y="1428750"/>
-                </a:lnTo>
-                <a:lnTo>
-                  <a:pt x="0" y="1428750"/>
-                </a:lnTo>
-                <a:lnTo>
-                  <a:pt x="0" y="0"/>
-                </a:lnTo>
-                <a:close/>
-              </a:path>
-            </a:pathLst>
-          </a:custGeom>
-          <a:solidFill>
-            <a:srgbClr val="000000"/>
-          </a:solidFill>
-          <a:ln w="76200">
-            <a:solidFill>
-              <a:srgbClr val="000000"/>
-            </a:solidFill>
-            <a:prstDash val="solid"/>
-          </a:ln>
-        </p:spPr>
-      </p:sp>
-      <p:sp>
-        <p:nvSpPr>
-          <p:cNvPr id="9" name="Text 6"/>
-          <p:cNvSpPr/>
-          <p:nvPr/>
-        </p:nvSpPr>
-        <p:spPr>
-          <a:xfrm>
-            <a:off x="4070375" y="3352800"/>
-            <a:ext cx="4048125" cy="914400"/>
-          </a:xfrm>
-          <a:prstGeom prst="rect">
-            <a:avLst/>
-          </a:prstGeom>
-          <a:noFill/>
-          <a:ln/>
-        </p:spPr>
-        <p:txBody>
-          <a:bodyPr wrap="square" lIns="0" tIns="0" rIns="0" bIns="0" rtlCol="0" anchor="ctr"/>
-          <a:lstStyle/>
-          <a:p>
-            <a:pPr algn="ctr">
-              <a:lnSpc>
-                <a:spcPct val="110000"/>
-              </a:lnSpc>
-            </a:pPr>
-            <a:r>
-              <a:rPr lang="en-US" sz="1800" b="1" dirty="0">
-                <a:solidFill>
-                  <a:srgbClr val="FFFFFF"/>
-                </a:solidFill>
-                <a:latin typeface="Noto Sans SC" pitchFamily="34" charset="0"/>
-                <a:ea typeface="Noto Sans SC" pitchFamily="34" charset="-122"/>
-                <a:cs typeface="Noto Sans SC" pitchFamily="34" charset="-120"/>
-              </a:rPr>
-              <a:t>In a world of infinite money printing,</a:t>
-            </a:r>
-            <a:endParaRPr lang="en-US" sz="1600" dirty="0"/>
-          </a:p>
-          <a:p>
-            <a:pPr algn="ctr">
-              <a:lnSpc>
-                <a:spcPct val="110000"/>
-              </a:lnSpc>
-            </a:pPr>
-            <a:r>
-              <a:rPr lang="en-US" sz="1800" b="1" dirty="0">
-                <a:solidFill>
-                  <a:srgbClr val="FFFFFF"/>
-                </a:solidFill>
-                <a:latin typeface="Noto Sans SC" pitchFamily="34" charset="0"/>
-                <a:ea typeface="Noto Sans SC" pitchFamily="34" charset="-122"/>
-                <a:cs typeface="Noto Sans SC" pitchFamily="34" charset="-120"/>
-              </a:rPr>
-              <a:t>can a fixed-supply digital asset</a:t>
-            </a:r>
-            <a:endParaRPr lang="en-US" sz="1600" dirty="0"/>
-          </a:p>
-          <a:p>
-            <a:pPr algn="ctr">
-              <a:lnSpc>
-                <a:spcPct val="110000"/>
-              </a:lnSpc>
-            </a:pPr>
-            <a:r>
-              <a:rPr lang="en-US" sz="1800" b="1" dirty="0">
-                <a:solidFill>
-                  <a:srgbClr val="FFFFFF"/>
-                </a:solidFill>
-                <a:latin typeface="Noto Sans SC" pitchFamily="34" charset="0"/>
-                <a:ea typeface="Noto Sans SC" pitchFamily="34" charset="-122"/>
-                <a:cs typeface="Noto Sans SC" pitchFamily="34" charset="-120"/>
-              </a:rPr>
-              <a:t>become the ultimate store of value?</a:t>
-            </a:r>
-            <a:endParaRPr lang="en-US" sz="1600" dirty="0"/>
-          </a:p>
-        </p:txBody>
-      </p:sp>
-      <p:sp>
-        <p:nvSpPr>
-          <p:cNvPr id="10" name="Shape 7"/>
-          <p:cNvSpPr/>
-          <p:nvPr/>
-        </p:nvSpPr>
-        <p:spPr>
-          <a:xfrm>
-            <a:off x="3743697" y="5400675"/>
-            <a:ext cx="4705350" cy="781050"/>
-          </a:xfrm>
-          <a:custGeom>
-            <a:avLst/>
-            <a:gdLst/>
-            <a:ahLst/>
-            <a:cxnLst/>
-            <a:rect l="l" t="t" r="r" b="b"/>
-            <a:pathLst>
-              <a:path w="4705350" h="781050">
-                <a:moveTo>
-                  <a:pt x="0" y="0"/>
-                </a:moveTo>
-                <a:lnTo>
-                  <a:pt x="4705350" y="0"/>
-                </a:lnTo>
-                <a:lnTo>
-                  <a:pt x="4705350" y="781050"/>
-                </a:lnTo>
-                <a:lnTo>
-                  <a:pt x="0" y="781050"/>
-                </a:lnTo>
-                <a:lnTo>
-                  <a:pt x="0" y="0"/>
-                </a:lnTo>
-                <a:close/>
-              </a:path>
-            </a:pathLst>
-          </a:custGeom>
-          <a:solidFill>
-            <a:srgbClr val="FFFFFF"/>
-          </a:solidFill>
-          <a:ln w="76200">
-            <a:solidFill>
-              <a:srgbClr val="000000"/>
-            </a:solidFill>
-            <a:prstDash val="solid"/>
-          </a:ln>
-          <a:effectLst>
-            <a:outerShdw sx="100000" sy="100000" kx="0" ky="0" algn="bl" rotWithShape="0" blurRad="101600" dist="38100" dir="2700000">
-              <a:srgbClr val="000000">
-                <a:alpha val="100000"/>
-              </a:srgbClr>
-            </a:outerShdw>
-          </a:effectLst>
-        </p:spPr>
-      </p:sp>
-      <p:sp>
-        <p:nvSpPr>
-          <p:cNvPr id="11" name="Text 8"/>
-          <p:cNvSpPr/>
-          <p:nvPr/>
-        </p:nvSpPr>
-        <p:spPr>
-          <a:xfrm>
-            <a:off x="4000872" y="5657850"/>
-            <a:ext cx="4286250" cy="266700"/>
-          </a:xfrm>
-          <a:prstGeom prst="rect">
-            <a:avLst/>
-          </a:prstGeom>
-          <a:noFill/>
-          <a:ln/>
-        </p:spPr>
-        <p:txBody>
-          <a:bodyPr wrap="square" lIns="0" tIns="0" rIns="0" bIns="0" rtlCol="0" anchor="ctr"/>
-          <a:lstStyle/>
-          <a:p>
-            <a:pPr>
-              <a:lnSpc>
-                <a:spcPct val="120000"/>
-              </a:lnSpc>
-            </a:pPr>
-            <a:r>
-              <a:rPr lang="en-US" sz="1500" b="1" dirty="0">
-                <a:solidFill>
-                  <a:srgbClr val="000000"/>
-                </a:solidFill>
-                <a:latin typeface="Noto Sans SC" pitchFamily="34" charset="0"/>
-                <a:ea typeface="Noto Sans SC" pitchFamily="34" charset="-122"/>
-                <a:cs typeface="Noto Sans SC" pitchFamily="34" charset="-120"/>
-              </a:rPr>
-              <a:t>▶ Bitcoin: The Digital Revolution | March 2026</a:t>
-            </a:r>
-            <a:endParaRPr lang="en-US" sz="1600" dirty="0"/>
-          </a:p>
-        </p:txBody>
-      </p:sp>
-    </p:spTree>
-  </p:cSld>
-  <p:clrMapOvr>
-    <a:masterClrMapping/>
-  </p:clrMapOvr>
-</p:sld>
-</file>
-
 <file path=ppt/slides/slide3.xml><?xml version="1.0" encoding="utf-8"?>
-<p:sld xmlns:a="http://schemas.openxmlformats.org/drawingml/2006/main" xmlns:r="http://schemas.openxmlformats.org/officeDocument/2006/relationships" xmlns:p="http://schemas.openxmlformats.org/presentationml/2006/main">
+<p:sld xmlns:a="http://schemas.openxmlformats.org/drawingml/2006/main" xmlns:p="http://schemas.openxmlformats.org/presentationml/2006/main" xmlns:r="http://schemas.openxmlformats.org/officeDocument/2006/relationships">
   <p:cSld name="Slide 3">
     <p:bg>
       <p:bgPr>
@@ -38956,17 +35645,21 @@
               </a:lnSpc>
             </a:pPr>
             <a:r>
-              <a:rPr lang="en-US" sz="3600" b="1" dirty="0">
-                <a:solidFill>
-                  <a:srgbClr val="FFFFFF"/>
-                </a:solidFill>
+              <a:rPr lang="en-US" sz="3600" b="1" dirty="0" i="1">
                 <a:latin typeface="Noto Sans SC" pitchFamily="34" charset="0"/>
                 <a:ea typeface="Noto Sans SC" pitchFamily="34" charset="-122"/>
                 <a:cs typeface="Noto Sans SC" pitchFamily="34" charset="-120"/>
+                <a:solidFill>
+                  <a:srgbClr val="00008B"/>
+                </a:solidFill>
               </a:rPr>
               <a:t>01</a:t>
             </a:r>
-            <a:endParaRPr lang="en-US" sz="1600" dirty="0"/>
+            <a:endParaRPr lang="en-US" sz="1600" dirty="0" i="1">
+              <a:solidFill>
+                <a:srgbClr val="00008B"/>
+              </a:solidFill>
+            </a:endParaRPr>
           </a:p>
         </p:txBody>
       </p:sp>
@@ -39126,17 +35819,21 @@
               </a:lnSpc>
             </a:pPr>
             <a:r>
-              <a:rPr lang="en-US" sz="2700" b="1" dirty="0">
-                <a:solidFill>
-                  <a:srgbClr val="000000"/>
-                </a:solidFill>
+              <a:rPr lang="en-US" sz="2700" b="1" dirty="0" i="1">
                 <a:latin typeface="Noto Sans SC" pitchFamily="34" charset="0"/>
                 <a:ea typeface="Noto Sans SC" pitchFamily="34" charset="-122"/>
                 <a:cs typeface="Noto Sans SC" pitchFamily="34" charset="-120"/>
+                <a:solidFill>
+                  <a:srgbClr val="00008B"/>
+                </a:solidFill>
               </a:rPr>
               <a:t>Bitcoin's Origin Story</a:t>
             </a:r>
-            <a:endParaRPr lang="en-US" sz="1600" dirty="0"/>
+            <a:endParaRPr lang="en-US" sz="1600" dirty="0" i="1">
+              <a:solidFill>
+                <a:srgbClr val="00008B"/>
+              </a:solidFill>
+            </a:endParaRPr>
           </a:p>
         </p:txBody>
       </p:sp>
@@ -39216,17 +35913,21 @@
               </a:lnSpc>
             </a:pPr>
             <a:r>
-              <a:rPr lang="en-US" sz="1800" b="1" dirty="0">
-                <a:solidFill>
-                  <a:srgbClr val="000000"/>
-                </a:solidFill>
+              <a:rPr lang="en-US" sz="1800" b="1" dirty="0" i="1">
                 <a:latin typeface="Noto Sans SC" pitchFamily="34" charset="0"/>
                 <a:ea typeface="Noto Sans SC" pitchFamily="34" charset="-122"/>
                 <a:cs typeface="Noto Sans SC" pitchFamily="34" charset="-120"/>
+                <a:solidFill>
+                  <a:srgbClr val="00008B"/>
+                </a:solidFill>
               </a:rPr>
               <a:t>▶ From Cypherpunk Vision to Financial Revolution</a:t>
             </a:r>
-            <a:endParaRPr lang="en-US" sz="1600" dirty="0"/>
+            <a:endParaRPr lang="en-US" sz="1600" dirty="0" i="1">
+              <a:solidFill>
+                <a:srgbClr val="00008B"/>
+              </a:solidFill>
+            </a:endParaRPr>
           </a:p>
         </p:txBody>
       </p:sp>
@@ -41648,12 +38349,12 @@
 </file>
 
 <file path=ppt/slides/slide5.xml><?xml version="1.0" encoding="utf-8"?>
-<p:sld xmlns:a="http://schemas.openxmlformats.org/drawingml/2006/main" xmlns:r="http://schemas.openxmlformats.org/officeDocument/2006/relationships" xmlns:p="http://schemas.openxmlformats.org/presentationml/2006/main">
+<p:sld xmlns:a="http://schemas.openxmlformats.org/drawingml/2006/main" xmlns:p="http://schemas.openxmlformats.org/presentationml/2006/main" xmlns:r="http://schemas.openxmlformats.org/officeDocument/2006/relationships">
   <p:cSld name="Slide 5">
     <p:bg>
       <p:bgPr>
         <a:solidFill>
-          <a:srgbClr val="FFFFFF"/>
+          <a:srgbClr val="D3D3D3"/>
         </a:solidFill>
       </p:bgPr>
     </p:bg>
